--- a/OVERALL_REPORT.pptx
+++ b/OVERALL_REPORT.pptx
@@ -3578,7 +3578,7 @@
                 </a:solidFill>
                 <a:latin typeface="Georgia"/>
               </a:rPr>
-              <a:t>328,417</a:t>
+              <a:t>328,449</a:t>
             </a:r>
           </a:p>
         </p:txBody>
@@ -4401,7 +4401,7 @@
                 </a:solidFill>
                 <a:latin typeface="Georgia"/>
               </a:rPr>
-              <a:t>115,396</a:t>
+              <a:t>115,426</a:t>
             </a:r>
           </a:p>
         </p:txBody>
@@ -4659,7 +4659,7 @@
                 </a:solidFill>
                 <a:latin typeface="Georgia"/>
               </a:rPr>
-              <a:t>131,109</a:t>
+              <a:t>131,110</a:t>
             </a:r>
           </a:p>
         </p:txBody>
@@ -4917,7 +4917,7 @@
                 </a:solidFill>
                 <a:latin typeface="Georgia"/>
               </a:rPr>
-              <a:t>81,020</a:t>
+              <a:t>81,021</a:t>
             </a:r>
           </a:p>
         </p:txBody>
@@ -5587,7 +5587,7 @@
                 </a:solidFill>
                 <a:latin typeface="Helvetica Neue"/>
               </a:rPr>
-              <a:t>59,245   (13 posts · 4,557 avg)</a:t>
+              <a:t>59,249   (13 posts · 4,558 avg)</a:t>
             </a:r>
           </a:p>
         </p:txBody>
@@ -5635,7 +5635,7 @@
         <p:spPr>
           <a:xfrm>
             <a:off x="3383280" y="2532888"/>
-            <a:ext cx="5361730" cy="192024"/>
+            <a:ext cx="5361483" cy="192024"/>
           </a:xfrm>
           <a:prstGeom prst="rect">
             <a:avLst/>
@@ -5678,7 +5678,7 @@
         </p:nvSpPr>
         <p:spPr>
           <a:xfrm>
-            <a:off x="8836450" y="2505456"/>
+            <a:off x="8836203" y="2505456"/>
             <a:ext cx="2286000" cy="329184"/>
           </a:xfrm>
           <a:prstGeom prst="rect">
@@ -5699,7 +5699,7 @@
                 </a:solidFill>
                 <a:latin typeface="Helvetica Neue"/>
               </a:rPr>
-              <a:t>46,319   (13 posts · 3,563 avg)</a:t>
+              <a:t>46,320   (13 posts · 3,563 avg)</a:t>
             </a:r>
           </a:p>
         </p:txBody>
@@ -5747,7 +5747,7 @@
         <p:spPr>
           <a:xfrm>
             <a:off x="3383280" y="2862072"/>
-            <a:ext cx="4403612" cy="192024"/>
+            <a:ext cx="4404588" cy="192024"/>
           </a:xfrm>
           <a:prstGeom prst="rect">
             <a:avLst/>
@@ -5790,7 +5790,7 @@
         </p:nvSpPr>
         <p:spPr>
           <a:xfrm>
-            <a:off x="7878332" y="2834640"/>
+            <a:off x="7879308" y="2834640"/>
             <a:ext cx="2286000" cy="329184"/>
           </a:xfrm>
           <a:prstGeom prst="rect">
@@ -5811,7 +5811,7 @@
                 </a:solidFill>
                 <a:latin typeface="Helvetica Neue"/>
               </a:rPr>
-              <a:t>38,042   (54 posts · 704 avg)</a:t>
+              <a:t>38,053   (54 posts · 705 avg)</a:t>
             </a:r>
           </a:p>
         </p:txBody>
@@ -5859,7 +5859,7 @@
         <p:spPr>
           <a:xfrm>
             <a:off x="3383280" y="3191256"/>
-            <a:ext cx="4284036" cy="192024"/>
+            <a:ext cx="4283978" cy="192024"/>
           </a:xfrm>
           <a:prstGeom prst="rect">
             <a:avLst/>
@@ -5902,7 +5902,7 @@
         </p:nvSpPr>
         <p:spPr>
           <a:xfrm>
-            <a:off x="7758756" y="3163824"/>
+            <a:off x="7758698" y="3163824"/>
             <a:ext cx="2286000" cy="329184"/>
           </a:xfrm>
           <a:prstGeom prst="rect">
@@ -5923,7 +5923,7 @@
                 </a:solidFill>
                 <a:latin typeface="Helvetica Neue"/>
               </a:rPr>
-              <a:t>37,009   (25 posts · 1,480 avg)</a:t>
+              <a:t>37,011   (25 posts · 1,480 avg)</a:t>
             </a:r>
           </a:p>
         </p:txBody>
@@ -5971,7 +5971,7 @@
         <p:spPr>
           <a:xfrm>
             <a:off x="3383280" y="3520440"/>
-            <a:ext cx="3578152" cy="192024"/>
+            <a:ext cx="3577910" cy="192024"/>
           </a:xfrm>
           <a:prstGeom prst="rect">
             <a:avLst/>
@@ -6014,7 +6014,7 @@
         </p:nvSpPr>
         <p:spPr>
           <a:xfrm>
-            <a:off x="7052872" y="3493008"/>
+            <a:off x="7052630" y="3493008"/>
             <a:ext cx="2286000" cy="329184"/>
           </a:xfrm>
           <a:prstGeom prst="rect">
@@ -6083,7 +6083,7 @@
         <p:spPr>
           <a:xfrm>
             <a:off x="3383280" y="3849624"/>
-            <a:ext cx="2422554" cy="192024"/>
+            <a:ext cx="2422390" cy="192024"/>
           </a:xfrm>
           <a:prstGeom prst="rect">
             <a:avLst/>
@@ -6126,7 +6126,7 @@
         </p:nvSpPr>
         <p:spPr>
           <a:xfrm>
-            <a:off x="5897274" y="3822192"/>
+            <a:off x="5897110" y="3822192"/>
             <a:ext cx="2286000" cy="329184"/>
           </a:xfrm>
           <a:prstGeom prst="rect">
@@ -6195,7 +6195,7 @@
         <p:spPr>
           <a:xfrm>
             <a:off x="3383280" y="4178807"/>
-            <a:ext cx="1915077" cy="192024"/>
+            <a:ext cx="1915063" cy="192024"/>
           </a:xfrm>
           <a:prstGeom prst="rect">
             <a:avLst/>
@@ -6238,7 +6238,7 @@
         </p:nvSpPr>
         <p:spPr>
           <a:xfrm>
-            <a:off x="5389797" y="4151376"/>
+            <a:off x="5389783" y="4151376"/>
             <a:ext cx="2286000" cy="329184"/>
           </a:xfrm>
           <a:prstGeom prst="rect">
@@ -6259,7 +6259,7 @@
                 </a:solidFill>
                 <a:latin typeface="Helvetica Neue"/>
               </a:rPr>
-              <a:t>16,544   (15 posts · 1,103 avg)</a:t>
+              <a:t>16,545   (15 posts · 1,103 avg)</a:t>
             </a:r>
           </a:p>
         </p:txBody>
@@ -6307,7 +6307,7 @@
         <p:spPr>
           <a:xfrm>
             <a:off x="3383280" y="4507992"/>
-            <a:ext cx="1729519" cy="192024"/>
+            <a:ext cx="1729402" cy="192024"/>
           </a:xfrm>
           <a:prstGeom prst="rect">
             <a:avLst/>
@@ -6350,7 +6350,7 @@
         </p:nvSpPr>
         <p:spPr>
           <a:xfrm>
-            <a:off x="5204239" y="4480560"/>
+            <a:off x="5204122" y="4480560"/>
             <a:ext cx="2286000" cy="329184"/>
           </a:xfrm>
           <a:prstGeom prst="rect">
@@ -6419,7 +6419,7 @@
         <p:spPr>
           <a:xfrm>
             <a:off x="3383280" y="4837176"/>
-            <a:ext cx="1495228" cy="192024"/>
+            <a:ext cx="1495127" cy="192024"/>
           </a:xfrm>
           <a:prstGeom prst="rect">
             <a:avLst/>
@@ -6462,7 +6462,7 @@
         </p:nvSpPr>
         <p:spPr>
           <a:xfrm>
-            <a:off x="4969948" y="4809744"/>
+            <a:off x="4969847" y="4809744"/>
             <a:ext cx="2286000" cy="329184"/>
           </a:xfrm>
           <a:prstGeom prst="rect">
@@ -6531,7 +6531,7 @@
         <p:spPr>
           <a:xfrm>
             <a:off x="3383280" y="5166359"/>
-            <a:ext cx="1364307" cy="192024"/>
+            <a:ext cx="1364215" cy="192024"/>
           </a:xfrm>
           <a:prstGeom prst="rect">
             <a:avLst/>
@@ -6574,7 +6574,7 @@
         </p:nvSpPr>
         <p:spPr>
           <a:xfrm>
-            <a:off x="4839027" y="5138928"/>
+            <a:off x="4838935" y="5138928"/>
             <a:ext cx="2286000" cy="329184"/>
           </a:xfrm>
           <a:prstGeom prst="rect">
@@ -6643,7 +6643,7 @@
         <p:spPr>
           <a:xfrm>
             <a:off x="3383280" y="5495543"/>
-            <a:ext cx="932766" cy="192024"/>
+            <a:ext cx="932935" cy="192024"/>
           </a:xfrm>
           <a:prstGeom prst="rect">
             <a:avLst/>
@@ -6686,7 +6686,7 @@
         </p:nvSpPr>
         <p:spPr>
           <a:xfrm>
-            <a:off x="4407486" y="5468112"/>
+            <a:off x="4407655" y="5468112"/>
             <a:ext cx="2286000" cy="329184"/>
           </a:xfrm>
           <a:prstGeom prst="rect">
@@ -6707,7 +6707,7 @@
                 </a:solidFill>
                 <a:latin typeface="Helvetica Neue"/>
               </a:rPr>
-              <a:t>8,058   (6 posts · 1,343 avg)</a:t>
+              <a:t>8,060   (6 posts · 1,343 avg)</a:t>
             </a:r>
           </a:p>
         </p:txBody>
@@ -6755,7 +6755,7 @@
         <p:spPr>
           <a:xfrm>
             <a:off x="3383280" y="5824728"/>
-            <a:ext cx="849537" cy="192024"/>
+            <a:ext cx="849711" cy="192024"/>
           </a:xfrm>
           <a:prstGeom prst="rect">
             <a:avLst/>
@@ -6798,7 +6798,7 @@
         </p:nvSpPr>
         <p:spPr>
           <a:xfrm>
-            <a:off x="4324257" y="5797296"/>
+            <a:off x="4324431" y="5797296"/>
             <a:ext cx="2286000" cy="329184"/>
           </a:xfrm>
           <a:prstGeom prst="rect">
@@ -6819,7 +6819,7 @@
                 </a:solidFill>
                 <a:latin typeface="Helvetica Neue"/>
               </a:rPr>
-              <a:t>7,339   (16 posts · 459 avg)</a:t>
+              <a:t>7,341   (16 posts · 459 avg)</a:t>
             </a:r>
           </a:p>
         </p:txBody>

--- a/OVERALL_REPORT.pptx
+++ b/OVERALL_REPORT.pptx
@@ -3277,7 +3277,7 @@
                 </a:solidFill>
                 <a:latin typeface="Georgia"/>
               </a:rPr>
-              <a:t>Since Jun 8, 2026 · 2026-07-17</a:t>
+              <a:t>Since Jun 8, 2026 · 2026-07-20</a:t>
             </a:r>
           </a:p>
         </p:txBody>
@@ -3578,7 +3578,7 @@
                 </a:solidFill>
                 <a:latin typeface="Georgia"/>
               </a:rPr>
-              <a:t>328,449</a:t>
+              <a:t>332,841</a:t>
             </a:r>
           </a:p>
         </p:txBody>
@@ -3769,7 +3769,7 @@
                 </a:solidFill>
                 <a:latin typeface="Georgia"/>
               </a:rPr>
-              <a:t>223</a:t>
+              <a:t>231</a:t>
             </a:r>
           </a:p>
         </p:txBody>
@@ -3925,7 +3925,7 @@
                 </a:solidFill>
                 <a:latin typeface="Georgia"/>
               </a:rPr>
-              <a:t>9,427</a:t>
+              <a:t>9,576</a:t>
             </a:r>
           </a:p>
         </p:txBody>
@@ -4081,7 +4081,7 @@
                 </a:solidFill>
                 <a:latin typeface="Georgia"/>
               </a:rPr>
-              <a:t>1,472</a:t>
+              <a:t>1,440</a:t>
             </a:r>
           </a:p>
         </p:txBody>
@@ -4401,7 +4401,7 @@
                 </a:solidFill>
                 <a:latin typeface="Georgia"/>
               </a:rPr>
-              <a:t>115,426</a:t>
+              <a:t>117,782</a:t>
             </a:r>
           </a:p>
         </p:txBody>
@@ -4469,7 +4469,7 @@
                 </a:solidFill>
                 <a:latin typeface="Helvetica Neue"/>
               </a:rPr>
-              <a:t>72 posts</a:t>
+              <a:t>75 posts</a:t>
             </a:r>
           </a:p>
         </p:txBody>
@@ -4503,7 +4503,7 @@
                 </a:solidFill>
                 <a:latin typeface="Helvetica Neue"/>
               </a:rPr>
-              <a:t>1,603 avg views/post</a:t>
+              <a:t>1,570 avg views/post</a:t>
             </a:r>
           </a:p>
         </p:txBody>
@@ -4659,7 +4659,7 @@
                 </a:solidFill>
                 <a:latin typeface="Georgia"/>
               </a:rPr>
-              <a:t>131,110</a:t>
+              <a:t>131,989</a:t>
             </a:r>
           </a:p>
         </p:txBody>
@@ -4727,7 +4727,7 @@
                 </a:solidFill>
                 <a:latin typeface="Helvetica Neue"/>
               </a:rPr>
-              <a:t>65 posts</a:t>
+              <a:t>67 posts</a:t>
             </a:r>
           </a:p>
         </p:txBody>
@@ -4761,7 +4761,7 @@
                 </a:solidFill>
                 <a:latin typeface="Helvetica Neue"/>
               </a:rPr>
-              <a:t>2,017 avg views/post</a:t>
+              <a:t>1,970 avg views/post</a:t>
             </a:r>
           </a:p>
         </p:txBody>
@@ -4917,7 +4917,7 @@
                 </a:solidFill>
                 <a:latin typeface="Georgia"/>
               </a:rPr>
-              <a:t>81,021</a:t>
+              <a:t>82,163</a:t>
             </a:r>
           </a:p>
         </p:txBody>
@@ -4985,7 +4985,7 @@
                 </a:solidFill>
                 <a:latin typeface="Helvetica Neue"/>
               </a:rPr>
-              <a:t>79 posts</a:t>
+              <a:t>82 posts</a:t>
             </a:r>
           </a:p>
         </p:txBody>
@@ -5019,7 +5019,7 @@
                 </a:solidFill>
                 <a:latin typeface="Helvetica Neue"/>
               </a:rPr>
-              <a:t>1,026 avg views/post</a:t>
+              <a:t>1,002 avg views/post</a:t>
             </a:r>
           </a:p>
         </p:txBody>
@@ -5175,7 +5175,7 @@
                 </a:solidFill>
                 <a:latin typeface="Georgia"/>
               </a:rPr>
-              <a:t>892</a:t>
+              <a:t>907</a:t>
             </a:r>
           </a:p>
         </p:txBody>
@@ -5277,7 +5277,7 @@
                 </a:solidFill>
                 <a:latin typeface="Helvetica Neue"/>
               </a:rPr>
-              <a:t>127 avg views/post</a:t>
+              <a:t>130 avg views/post</a:t>
             </a:r>
           </a:p>
         </p:txBody>
@@ -5587,7 +5587,7 @@
                 </a:solidFill>
                 <a:latin typeface="Helvetica Neue"/>
               </a:rPr>
-              <a:t>59,249   (13 posts · 4,558 avg)</a:t>
+              <a:t>59,600   (13 posts · 4,585 avg)</a:t>
             </a:r>
           </a:p>
         </p:txBody>
@@ -5635,7 +5635,7 @@
         <p:spPr>
           <a:xfrm>
             <a:off x="3383280" y="2532888"/>
-            <a:ext cx="5361483" cy="192024"/>
+            <a:ext cx="5332670" cy="192024"/>
           </a:xfrm>
           <a:prstGeom prst="rect">
             <a:avLst/>
@@ -5678,7 +5678,7 @@
         </p:nvSpPr>
         <p:spPr>
           <a:xfrm>
-            <a:off x="8836203" y="2505456"/>
+            <a:off x="8807390" y="2505456"/>
             <a:ext cx="2286000" cy="329184"/>
           </a:xfrm>
           <a:prstGeom prst="rect">
@@ -5699,7 +5699,7 @@
                 </a:solidFill>
                 <a:latin typeface="Helvetica Neue"/>
               </a:rPr>
-              <a:t>46,320   (13 posts · 3,563 avg)</a:t>
+              <a:t>46,344   (13 posts · 3,565 avg)</a:t>
             </a:r>
           </a:p>
         </p:txBody>
@@ -5747,7 +5747,7 @@
         <p:spPr>
           <a:xfrm>
             <a:off x="3383280" y="2862072"/>
-            <a:ext cx="4404588" cy="192024"/>
+            <a:ext cx="4589106" cy="192024"/>
           </a:xfrm>
           <a:prstGeom prst="rect">
             <a:avLst/>
@@ -5790,7 +5790,7 @@
         </p:nvSpPr>
         <p:spPr>
           <a:xfrm>
-            <a:off x="7879308" y="2834640"/>
+            <a:off x="8063826" y="2834640"/>
             <a:ext cx="2286000" cy="329184"/>
           </a:xfrm>
           <a:prstGeom prst="rect">
@@ -5811,7 +5811,7 @@
                 </a:solidFill>
                 <a:latin typeface="Helvetica Neue"/>
               </a:rPr>
-              <a:t>38,053   (54 posts · 705 avg)</a:t>
+              <a:t>39,882   (56 posts · 712 avg)</a:t>
             </a:r>
           </a:p>
         </p:txBody>
@@ -5859,7 +5859,7 @@
         <p:spPr>
           <a:xfrm>
             <a:off x="3383280" y="3191256"/>
-            <a:ext cx="4283978" cy="192024"/>
+            <a:ext cx="4260474" cy="192024"/>
           </a:xfrm>
           <a:prstGeom prst="rect">
             <a:avLst/>
@@ -5902,7 +5902,7 @@
         </p:nvSpPr>
         <p:spPr>
           <a:xfrm>
-            <a:off x="7758698" y="3163824"/>
+            <a:off x="7735194" y="3163824"/>
             <a:ext cx="2286000" cy="329184"/>
           </a:xfrm>
           <a:prstGeom prst="rect">
@@ -5923,7 +5923,7 @@
                 </a:solidFill>
                 <a:latin typeface="Helvetica Neue"/>
               </a:rPr>
-              <a:t>37,011   (25 posts · 1,480 avg)</a:t>
+              <a:t>37,026   (27 posts · 1,371 avg)</a:t>
             </a:r>
           </a:p>
         </p:txBody>
@@ -5971,7 +5971,7 @@
         <p:spPr>
           <a:xfrm>
             <a:off x="3383280" y="3520440"/>
-            <a:ext cx="3577910" cy="192024"/>
+            <a:ext cx="3557069" cy="192024"/>
           </a:xfrm>
           <a:prstGeom prst="rect">
             <a:avLst/>
@@ -6014,7 +6014,7 @@
         </p:nvSpPr>
         <p:spPr>
           <a:xfrm>
-            <a:off x="7052630" y="3493008"/>
+            <a:off x="7031789" y="3493008"/>
             <a:ext cx="2286000" cy="329184"/>
           </a:xfrm>
           <a:prstGeom prst="rect">
@@ -6035,7 +6035,7 @@
                 </a:solidFill>
                 <a:latin typeface="Helvetica Neue"/>
               </a:rPr>
-              <a:t>30,911   (12 posts · 2,576 avg)</a:t>
+              <a:t>30,913   (12 posts · 2,576 avg)</a:t>
             </a:r>
           </a:p>
         </p:txBody>
@@ -6083,7 +6083,7 @@
         <p:spPr>
           <a:xfrm>
             <a:off x="3383280" y="3849624"/>
-            <a:ext cx="2422390" cy="192024"/>
+            <a:ext cx="2408124" cy="192024"/>
           </a:xfrm>
           <a:prstGeom prst="rect">
             <a:avLst/>
@@ -6126,7 +6126,7 @@
         </p:nvSpPr>
         <p:spPr>
           <a:xfrm>
-            <a:off x="5897110" y="3822192"/>
+            <a:off x="5882844" y="3822192"/>
             <a:ext cx="2286000" cy="329184"/>
           </a:xfrm>
           <a:prstGeom prst="rect">
@@ -6195,7 +6195,7 @@
         <p:spPr>
           <a:xfrm>
             <a:off x="3383280" y="4178807"/>
-            <a:ext cx="1915063" cy="192024"/>
+            <a:ext cx="1909538" cy="192024"/>
           </a:xfrm>
           <a:prstGeom prst="rect">
             <a:avLst/>
@@ -6238,7 +6238,7 @@
         </p:nvSpPr>
         <p:spPr>
           <a:xfrm>
-            <a:off x="5389783" y="4151376"/>
+            <a:off x="5384258" y="4151376"/>
             <a:ext cx="2286000" cy="329184"/>
           </a:xfrm>
           <a:prstGeom prst="rect">
@@ -6259,7 +6259,7 @@
                 </a:solidFill>
                 <a:latin typeface="Helvetica Neue"/>
               </a:rPr>
-              <a:t>16,545   (15 posts · 1,103 avg)</a:t>
+              <a:t>16,595   (15 posts · 1,106 avg)</a:t>
             </a:r>
           </a:p>
         </p:txBody>
@@ -6307,7 +6307,7 @@
         <p:spPr>
           <a:xfrm>
             <a:off x="3383280" y="4507992"/>
-            <a:ext cx="1729402" cy="192024"/>
+            <a:ext cx="1719217" cy="192024"/>
           </a:xfrm>
           <a:prstGeom prst="rect">
             <a:avLst/>
@@ -6350,7 +6350,7 @@
         </p:nvSpPr>
         <p:spPr>
           <a:xfrm>
-            <a:off x="5204122" y="4480560"/>
+            <a:off x="5193937" y="4480560"/>
             <a:ext cx="2286000" cy="329184"/>
           </a:xfrm>
           <a:prstGeom prst="rect">
@@ -6419,7 +6419,7 @@
         <p:spPr>
           <a:xfrm>
             <a:off x="3383280" y="4837176"/>
-            <a:ext cx="1495127" cy="192024"/>
+            <a:ext cx="1486436" cy="192024"/>
           </a:xfrm>
           <a:prstGeom prst="rect">
             <a:avLst/>
@@ -6462,7 +6462,7 @@
         </p:nvSpPr>
         <p:spPr>
           <a:xfrm>
-            <a:off x="4969847" y="4809744"/>
+            <a:off x="4961156" y="4809744"/>
             <a:ext cx="2286000" cy="329184"/>
           </a:xfrm>
           <a:prstGeom prst="rect">
@@ -6483,7 +6483,7 @@
                 </a:solidFill>
                 <a:latin typeface="Helvetica Neue"/>
               </a:rPr>
-              <a:t>12,917   (7 posts · 1,845 avg)</a:t>
+              <a:t>12,918   (7 posts · 1,845 avg)</a:t>
             </a:r>
           </a:p>
         </p:txBody>
@@ -6531,7 +6531,7 @@
         <p:spPr>
           <a:xfrm>
             <a:off x="3383280" y="5166359"/>
-            <a:ext cx="1364215" cy="192024"/>
+            <a:ext cx="1356181" cy="192024"/>
           </a:xfrm>
           <a:prstGeom prst="rect">
             <a:avLst/>
@@ -6574,7 +6574,7 @@
         </p:nvSpPr>
         <p:spPr>
           <a:xfrm>
-            <a:off x="4838935" y="5138928"/>
+            <a:off x="4830901" y="5138928"/>
             <a:ext cx="2286000" cy="329184"/>
           </a:xfrm>
           <a:prstGeom prst="rect">
@@ -6643,7 +6643,7 @@
         <p:spPr>
           <a:xfrm>
             <a:off x="3383280" y="5495543"/>
-            <a:ext cx="932935" cy="192024"/>
+            <a:ext cx="932388" cy="192024"/>
           </a:xfrm>
           <a:prstGeom prst="rect">
             <a:avLst/>
@@ -6686,7 +6686,7 @@
         </p:nvSpPr>
         <p:spPr>
           <a:xfrm>
-            <a:off x="4407655" y="5468112"/>
+            <a:off x="4407108" y="5468112"/>
             <a:ext cx="2286000" cy="329184"/>
           </a:xfrm>
           <a:prstGeom prst="rect">
@@ -6707,7 +6707,7 @@
                 </a:solidFill>
                 <a:latin typeface="Helvetica Neue"/>
               </a:rPr>
-              <a:t>8,060   (6 posts · 1,343 avg)</a:t>
+              <a:t>8,103   (6 posts · 1,350 avg)</a:t>
             </a:r>
           </a:p>
         </p:txBody>
@@ -6755,7 +6755,7 @@
         <p:spPr>
           <a:xfrm>
             <a:off x="3383280" y="5824728"/>
-            <a:ext cx="849711" cy="192024"/>
+            <a:ext cx="848389" cy="192024"/>
           </a:xfrm>
           <a:prstGeom prst="rect">
             <a:avLst/>
@@ -6798,7 +6798,7 @@
         </p:nvSpPr>
         <p:spPr>
           <a:xfrm>
-            <a:off x="4324431" y="5797296"/>
+            <a:off x="4323109" y="5797296"/>
             <a:ext cx="2286000" cy="329184"/>
           </a:xfrm>
           <a:prstGeom prst="rect">
@@ -6819,7 +6819,7 @@
                 </a:solidFill>
                 <a:latin typeface="Helvetica Neue"/>
               </a:rPr>
-              <a:t>7,341   (16 posts · 459 avg)</a:t>
+              <a:t>7,373   (16 posts · 461 avg)</a:t>
             </a:r>
           </a:p>
         </p:txBody>
@@ -7737,7 +7737,7 @@
                 </a:solidFill>
                 <a:latin typeface="Helvetica Neue"/>
               </a:rPr>
-              <a:t>27,000</a:t>
+              <a:t>27,200</a:t>
             </a:r>
           </a:p>
         </p:txBody>
@@ -7771,7 +7771,7 @@
                 </a:solidFill>
                 <a:latin typeface="Helvetica Neue"/>
               </a:rPr>
-              <a:t>796</a:t>
+              <a:t>800</a:t>
             </a:r>
           </a:p>
         </p:txBody>
@@ -7985,7 +7985,7 @@
                 </a:solidFill>
                 <a:latin typeface="Helvetica Neue"/>
               </a:rPr>
-              <a:t>15,867</a:t>
+              <a:t>15,935</a:t>
             </a:r>
           </a:p>
         </p:txBody>
@@ -9137,7 +9137,7 @@
                 </a:solidFill>
                 <a:latin typeface="Helvetica Neue"/>
               </a:rPr>
-              <a:t>6,322</a:t>
+              <a:t>6,341</a:t>
             </a:r>
           </a:p>
         </p:txBody>

--- a/OVERALL_REPORT.pptx
+++ b/OVERALL_REPORT.pptx
@@ -3277,7 +3277,7 @@
                 </a:solidFill>
                 <a:latin typeface="Georgia"/>
               </a:rPr>
-              <a:t>Since Jun 8, 2026 · 2026-07-20</a:t>
+              <a:t>Since Jun 8, 2026 · 2026-07-22</a:t>
             </a:r>
           </a:p>
         </p:txBody>
@@ -3578,7 +3578,7 @@
                 </a:solidFill>
                 <a:latin typeface="Georgia"/>
               </a:rPr>
-              <a:t>332,841</a:t>
+              <a:t>316,082</a:t>
             </a:r>
           </a:p>
         </p:txBody>
@@ -3769,7 +3769,7 @@
                 </a:solidFill>
                 <a:latin typeface="Georgia"/>
               </a:rPr>
-              <a:t>231</a:t>
+              <a:t>246</a:t>
             </a:r>
           </a:p>
         </p:txBody>
@@ -3925,7 +3925,7 @@
                 </a:solidFill>
                 <a:latin typeface="Georgia"/>
               </a:rPr>
-              <a:t>9,576</a:t>
+              <a:t>10,311</a:t>
             </a:r>
           </a:p>
         </p:txBody>
@@ -4081,7 +4081,7 @@
                 </a:solidFill>
                 <a:latin typeface="Georgia"/>
               </a:rPr>
-              <a:t>1,440</a:t>
+              <a:t>1,284</a:t>
             </a:r>
           </a:p>
         </p:txBody>
@@ -4401,7 +4401,7 @@
                 </a:solidFill>
                 <a:latin typeface="Georgia"/>
               </a:rPr>
-              <a:t>117,782</a:t>
+              <a:t>89,172</a:t>
             </a:r>
           </a:p>
         </p:txBody>
@@ -4469,7 +4469,7 @@
                 </a:solidFill>
                 <a:latin typeface="Helvetica Neue"/>
               </a:rPr>
-              <a:t>75 posts</a:t>
+              <a:t>80 posts</a:t>
             </a:r>
           </a:p>
         </p:txBody>
@@ -4503,7 +4503,7 @@
                 </a:solidFill>
                 <a:latin typeface="Helvetica Neue"/>
               </a:rPr>
-              <a:t>1,570 avg views/post</a:t>
+              <a:t>1,115 avg views/post</a:t>
             </a:r>
           </a:p>
         </p:txBody>
@@ -4659,7 +4659,7 @@
                 </a:solidFill>
                 <a:latin typeface="Georgia"/>
               </a:rPr>
-              <a:t>131,989</a:t>
+              <a:t>140,103</a:t>
             </a:r>
           </a:p>
         </p:txBody>
@@ -4727,7 +4727,7 @@
                 </a:solidFill>
                 <a:latin typeface="Helvetica Neue"/>
               </a:rPr>
-              <a:t>67 posts</a:t>
+              <a:t>71 posts</a:t>
             </a:r>
           </a:p>
         </p:txBody>
@@ -4761,7 +4761,7 @@
                 </a:solidFill>
                 <a:latin typeface="Helvetica Neue"/>
               </a:rPr>
-              <a:t>1,970 avg views/post</a:t>
+              <a:t>1,973 avg views/post</a:t>
             </a:r>
           </a:p>
         </p:txBody>
@@ -4917,7 +4917,7 @@
                 </a:solidFill>
                 <a:latin typeface="Georgia"/>
               </a:rPr>
-              <a:t>82,163</a:t>
+              <a:t>85,853</a:t>
             </a:r>
           </a:p>
         </p:txBody>
@@ -4985,7 +4985,7 @@
                 </a:solidFill>
                 <a:latin typeface="Helvetica Neue"/>
               </a:rPr>
-              <a:t>82 posts</a:t>
+              <a:t>87 posts</a:t>
             </a:r>
           </a:p>
         </p:txBody>
@@ -5019,7 +5019,7 @@
                 </a:solidFill>
                 <a:latin typeface="Helvetica Neue"/>
               </a:rPr>
-              <a:t>1,002 avg views/post</a:t>
+              <a:t>987 avg views/post</a:t>
             </a:r>
           </a:p>
         </p:txBody>
@@ -5175,7 +5175,7 @@
                 </a:solidFill>
                 <a:latin typeface="Georgia"/>
               </a:rPr>
-              <a:t>907</a:t>
+              <a:t>954</a:t>
             </a:r>
           </a:p>
         </p:txBody>
@@ -5243,7 +5243,7 @@
                 </a:solidFill>
                 <a:latin typeface="Helvetica Neue"/>
               </a:rPr>
-              <a:t>7 posts</a:t>
+              <a:t>8 posts</a:t>
             </a:r>
           </a:p>
         </p:txBody>
@@ -5277,7 +5277,7 @@
                 </a:solidFill>
                 <a:latin typeface="Helvetica Neue"/>
               </a:rPr>
-              <a:t>130 avg views/post</a:t>
+              <a:t>119 avg views/post</a:t>
             </a:r>
           </a:p>
         </p:txBody>
@@ -5587,7 +5587,7 @@
                 </a:solidFill>
                 <a:latin typeface="Helvetica Neue"/>
               </a:rPr>
-              <a:t>59,600   (13 posts · 4,585 avg)</a:t>
+              <a:t>49,287   (13 posts · 3,791 avg)</a:t>
             </a:r>
           </a:p>
         </p:txBody>
@@ -5635,7 +5635,7 @@
         <p:spPr>
           <a:xfrm>
             <a:off x="3383280" y="2532888"/>
-            <a:ext cx="5332670" cy="192024"/>
+            <a:ext cx="6335791" cy="192024"/>
           </a:xfrm>
           <a:prstGeom prst="rect">
             <a:avLst/>
@@ -5678,7 +5678,7 @@
         </p:nvSpPr>
         <p:spPr>
           <a:xfrm>
-            <a:off x="8807390" y="2505456"/>
+            <a:off x="9810511" y="2505456"/>
             <a:ext cx="2286000" cy="329184"/>
           </a:xfrm>
           <a:prstGeom prst="rect">
@@ -5699,7 +5699,7 @@
                 </a:solidFill>
                 <a:latin typeface="Helvetica Neue"/>
               </a:rPr>
-              <a:t>46,344   (13 posts · 3,565 avg)</a:t>
+              <a:t>45,534   (13 posts · 3,503 avg)</a:t>
             </a:r>
           </a:p>
         </p:txBody>
@@ -5733,7 +5733,7 @@
                 </a:solidFill>
                 <a:latin typeface="Helvetica Neue"/>
               </a:rPr>
-              <a:t>Other</a:t>
+              <a:t>Food</a:t>
             </a:r>
           </a:p>
         </p:txBody>
@@ -5747,7 +5747,119 @@
         <p:spPr>
           <a:xfrm>
             <a:off x="3383280" y="2862072"/>
-            <a:ext cx="4589106" cy="192024"/>
+            <a:ext cx="5056778" cy="192024"/>
+          </a:xfrm>
+          <a:prstGeom prst="rect">
+            <a:avLst/>
+          </a:prstGeom>
+          <a:solidFill>
+            <a:srgbClr val="1B7A43"/>
+          </a:solidFill>
+          <a:ln>
+            <a:noFill/>
+          </a:ln>
+          <a:effectLst/>
+        </p:spPr>
+        <p:style>
+          <a:lnRef idx="1">
+            <a:schemeClr val="accent1"/>
+          </a:lnRef>
+          <a:fillRef idx="3">
+            <a:schemeClr val="accent1"/>
+          </a:fillRef>
+          <a:effectRef idx="2">
+            <a:schemeClr val="accent1"/>
+          </a:effectRef>
+          <a:fontRef idx="minor">
+            <a:schemeClr val="lt1"/>
+          </a:fontRef>
+        </p:style>
+        <p:txBody>
+          <a:bodyPr rtlCol="0" anchor="ctr"/>
+          <a:lstStyle/>
+          <a:p>
+            <a:pPr algn="ctr"/>
+          </a:p>
+        </p:txBody>
+      </p:sp>
+      <p:sp>
+        <p:nvSpPr>
+          <p:cNvPr id="14" name="TextBox 13"/>
+          <p:cNvSpPr txBox="1"/>
+          <p:nvPr/>
+        </p:nvSpPr>
+        <p:spPr>
+          <a:xfrm>
+            <a:off x="8531498" y="2834640"/>
+            <a:ext cx="2286000" cy="329184"/>
+          </a:xfrm>
+          <a:prstGeom prst="rect">
+            <a:avLst/>
+          </a:prstGeom>
+          <a:noFill/>
+        </p:spPr>
+        <p:txBody>
+          <a:bodyPr wrap="square" lIns="0" rIns="0" tIns="0" bIns="0">
+            <a:spAutoFit/>
+          </a:bodyPr>
+          <a:lstStyle/>
+          <a:p>
+            <a:r>
+              <a:rPr sz="1000" b="0">
+                <a:solidFill>
+                  <a:srgbClr val="6B7082"/>
+                </a:solidFill>
+                <a:latin typeface="Helvetica Neue"/>
+              </a:rPr>
+              <a:t>36,342   (27 posts · 1,346 avg)</a:t>
+            </a:r>
+          </a:p>
+        </p:txBody>
+      </p:sp>
+      <p:sp>
+        <p:nvSpPr>
+          <p:cNvPr id="15" name="TextBox 14"/>
+          <p:cNvSpPr txBox="1"/>
+          <p:nvPr/>
+        </p:nvSpPr>
+        <p:spPr>
+          <a:xfrm>
+            <a:off x="731520" y="3163824"/>
+            <a:ext cx="2468880" cy="329184"/>
+          </a:xfrm>
+          <a:prstGeom prst="rect">
+            <a:avLst/>
+          </a:prstGeom>
+          <a:noFill/>
+        </p:spPr>
+        <p:txBody>
+          <a:bodyPr wrap="square" lIns="0" rIns="0" tIns="0" bIns="0">
+            <a:spAutoFit/>
+          </a:bodyPr>
+          <a:lstStyle/>
+          <a:p>
+            <a:r>
+              <a:rPr sz="1100" b="0">
+                <a:solidFill>
+                  <a:srgbClr val="141833"/>
+                </a:solidFill>
+                <a:latin typeface="Helvetica Neue"/>
+              </a:rPr>
+              <a:t>Other</a:t>
+            </a:r>
+          </a:p>
+        </p:txBody>
+      </p:sp>
+      <p:sp>
+        <p:nvSpPr>
+          <p:cNvPr id="16" name="Rectangle 15"/>
+          <p:cNvSpPr/>
+          <p:nvPr/>
+        </p:nvSpPr>
+        <p:spPr>
+          <a:xfrm>
+            <a:off x="3383280" y="3191256"/>
+            <a:ext cx="5000842" cy="192024"/>
           </a:xfrm>
           <a:prstGeom prst="rect">
             <a:avLst/>
@@ -5784,13 +5896,13 @@
       </p:sp>
       <p:sp>
         <p:nvSpPr>
-          <p:cNvPr id="14" name="TextBox 13"/>
-          <p:cNvSpPr txBox="1"/>
-          <p:nvPr/>
-        </p:nvSpPr>
-        <p:spPr>
-          <a:xfrm>
-            <a:off x="8063826" y="2834640"/>
+          <p:cNvPr id="17" name="TextBox 16"/>
+          <p:cNvSpPr txBox="1"/>
+          <p:nvPr/>
+        </p:nvSpPr>
+        <p:spPr>
+          <a:xfrm>
+            <a:off x="8475562" y="3163824"/>
             <a:ext cx="2286000" cy="329184"/>
           </a:xfrm>
           <a:prstGeom prst="rect">
@@ -5811,20 +5923,20 @@
                 </a:solidFill>
                 <a:latin typeface="Helvetica Neue"/>
               </a:rPr>
-              <a:t>39,882   (56 posts · 712 avg)</a:t>
-            </a:r>
-          </a:p>
-        </p:txBody>
-      </p:sp>
-      <p:sp>
-        <p:nvSpPr>
-          <p:cNvPr id="15" name="TextBox 14"/>
-          <p:cNvSpPr txBox="1"/>
-          <p:nvPr/>
-        </p:nvSpPr>
-        <p:spPr>
-          <a:xfrm>
-            <a:off x="731520" y="3163824"/>
+              <a:t>35,940   (65 posts · 553 avg)</a:t>
+            </a:r>
+          </a:p>
+        </p:txBody>
+      </p:sp>
+      <p:sp>
+        <p:nvSpPr>
+          <p:cNvPr id="18" name="TextBox 17"/>
+          <p:cNvSpPr txBox="1"/>
+          <p:nvPr/>
+        </p:nvSpPr>
+        <p:spPr>
+          <a:xfrm>
+            <a:off x="731520" y="3493008"/>
             <a:ext cx="2468880" cy="329184"/>
           </a:xfrm>
           <a:prstGeom prst="rect">
@@ -5845,21 +5957,693 @@
                 </a:solidFill>
                 <a:latin typeface="Helvetica Neue"/>
               </a:rPr>
-              <a:t>Food</a:t>
-            </a:r>
-          </a:p>
-        </p:txBody>
-      </p:sp>
-      <p:sp>
-        <p:nvSpPr>
-          <p:cNvPr id="16" name="Rectangle 15"/>
+              <a:t>Trujillo Scandal</a:t>
+            </a:r>
+          </a:p>
+        </p:txBody>
+      </p:sp>
+      <p:sp>
+        <p:nvSpPr>
+          <p:cNvPr id="19" name="Rectangle 18"/>
           <p:cNvSpPr/>
           <p:nvPr/>
         </p:nvSpPr>
         <p:spPr>
           <a:xfrm>
-            <a:off x="3383280" y="3191256"/>
-            <a:ext cx="4260474" cy="192024"/>
+            <a:off x="3383280" y="3520440"/>
+            <a:ext cx="4301503" cy="192024"/>
+          </a:xfrm>
+          <a:prstGeom prst="rect">
+            <a:avLst/>
+          </a:prstGeom>
+          <a:solidFill>
+            <a:srgbClr val="990011"/>
+          </a:solidFill>
+          <a:ln>
+            <a:noFill/>
+          </a:ln>
+          <a:effectLst/>
+        </p:spPr>
+        <p:style>
+          <a:lnRef idx="1">
+            <a:schemeClr val="accent1"/>
+          </a:lnRef>
+          <a:fillRef idx="3">
+            <a:schemeClr val="accent1"/>
+          </a:fillRef>
+          <a:effectRef idx="2">
+            <a:schemeClr val="accent1"/>
+          </a:effectRef>
+          <a:fontRef idx="minor">
+            <a:schemeClr val="lt1"/>
+          </a:fontRef>
+        </p:style>
+        <p:txBody>
+          <a:bodyPr rtlCol="0" anchor="ctr"/>
+          <a:lstStyle/>
+          <a:p>
+            <a:pPr algn="ctr"/>
+          </a:p>
+        </p:txBody>
+      </p:sp>
+      <p:sp>
+        <p:nvSpPr>
+          <p:cNvPr id="20" name="TextBox 19"/>
+          <p:cNvSpPr txBox="1"/>
+          <p:nvPr/>
+        </p:nvSpPr>
+        <p:spPr>
+          <a:xfrm>
+            <a:off x="7776223" y="3493008"/>
+            <a:ext cx="2286000" cy="329184"/>
+          </a:xfrm>
+          <a:prstGeom prst="rect">
+            <a:avLst/>
+          </a:prstGeom>
+          <a:noFill/>
+        </p:spPr>
+        <p:txBody>
+          <a:bodyPr wrap="square" lIns="0" rIns="0" tIns="0" bIns="0">
+            <a:spAutoFit/>
+          </a:bodyPr>
+          <a:lstStyle/>
+          <a:p>
+            <a:r>
+              <a:rPr sz="1000" b="0">
+                <a:solidFill>
+                  <a:srgbClr val="6B7082"/>
+                </a:solidFill>
+                <a:latin typeface="Helvetica Neue"/>
+              </a:rPr>
+              <a:t>30,914   (12 posts · 2,576 avg)</a:t>
+            </a:r>
+          </a:p>
+        </p:txBody>
+      </p:sp>
+      <p:sp>
+        <p:nvSpPr>
+          <p:cNvPr id="21" name="TextBox 20"/>
+          <p:cNvSpPr txBox="1"/>
+          <p:nvPr/>
+        </p:nvSpPr>
+        <p:spPr>
+          <a:xfrm>
+            <a:off x="731520" y="3822192"/>
+            <a:ext cx="2468880" cy="329184"/>
+          </a:xfrm>
+          <a:prstGeom prst="rect">
+            <a:avLst/>
+          </a:prstGeom>
+          <a:noFill/>
+        </p:spPr>
+        <p:txBody>
+          <a:bodyPr wrap="square" lIns="0" rIns="0" tIns="0" bIns="0">
+            <a:spAutoFit/>
+          </a:bodyPr>
+          <a:lstStyle/>
+          <a:p>
+            <a:r>
+              <a:rPr sz="1100" b="0">
+                <a:solidFill>
+                  <a:srgbClr val="141833"/>
+                </a:solidFill>
+                <a:latin typeface="Helvetica Neue"/>
+              </a:rPr>
+              <a:t>Council Chaos</a:t>
+            </a:r>
+          </a:p>
+        </p:txBody>
+      </p:sp>
+      <p:sp>
+        <p:nvSpPr>
+          <p:cNvPr id="22" name="Rectangle 21"/>
+          <p:cNvSpPr/>
+          <p:nvPr/>
+        </p:nvSpPr>
+        <p:spPr>
+          <a:xfrm>
+            <a:off x="3383280" y="3849624"/>
+            <a:ext cx="2912009" cy="192024"/>
+          </a:xfrm>
+          <a:prstGeom prst="rect">
+            <a:avLst/>
+          </a:prstGeom>
+          <a:solidFill>
+            <a:srgbClr val="990011"/>
+          </a:solidFill>
+          <a:ln>
+            <a:noFill/>
+          </a:ln>
+          <a:effectLst/>
+        </p:spPr>
+        <p:style>
+          <a:lnRef idx="1">
+            <a:schemeClr val="accent1"/>
+          </a:lnRef>
+          <a:fillRef idx="3">
+            <a:schemeClr val="accent1"/>
+          </a:fillRef>
+          <a:effectRef idx="2">
+            <a:schemeClr val="accent1"/>
+          </a:effectRef>
+          <a:fontRef idx="minor">
+            <a:schemeClr val="lt1"/>
+          </a:fontRef>
+        </p:style>
+        <p:txBody>
+          <a:bodyPr rtlCol="0" anchor="ctr"/>
+          <a:lstStyle/>
+          <a:p>
+            <a:pPr algn="ctr"/>
+          </a:p>
+        </p:txBody>
+      </p:sp>
+      <p:sp>
+        <p:nvSpPr>
+          <p:cNvPr id="23" name="TextBox 22"/>
+          <p:cNvSpPr txBox="1"/>
+          <p:nvPr/>
+        </p:nvSpPr>
+        <p:spPr>
+          <a:xfrm>
+            <a:off x="6386729" y="3822192"/>
+            <a:ext cx="2286000" cy="329184"/>
+          </a:xfrm>
+          <a:prstGeom prst="rect">
+            <a:avLst/>
+          </a:prstGeom>
+          <a:noFill/>
+        </p:spPr>
+        <p:txBody>
+          <a:bodyPr wrap="square" lIns="0" rIns="0" tIns="0" bIns="0">
+            <a:spAutoFit/>
+          </a:bodyPr>
+          <a:lstStyle/>
+          <a:p>
+            <a:r>
+              <a:rPr sz="1000" b="0">
+                <a:solidFill>
+                  <a:srgbClr val="6B7082"/>
+                </a:solidFill>
+                <a:latin typeface="Helvetica Neue"/>
+              </a:rPr>
+              <a:t>20,928   (5 posts · 4,186 avg)</a:t>
+            </a:r>
+          </a:p>
+        </p:txBody>
+      </p:sp>
+      <p:sp>
+        <p:nvSpPr>
+          <p:cNvPr id="24" name="TextBox 23"/>
+          <p:cNvSpPr txBox="1"/>
+          <p:nvPr/>
+        </p:nvSpPr>
+        <p:spPr>
+          <a:xfrm>
+            <a:off x="731520" y="4151376"/>
+            <a:ext cx="2468880" cy="329184"/>
+          </a:xfrm>
+          <a:prstGeom prst="rect">
+            <a:avLst/>
+          </a:prstGeom>
+          <a:noFill/>
+        </p:spPr>
+        <p:txBody>
+          <a:bodyPr wrap="square" lIns="0" rIns="0" tIns="0" bIns="0">
+            <a:spAutoFit/>
+          </a:bodyPr>
+          <a:lstStyle/>
+          <a:p>
+            <a:r>
+              <a:rPr sz="1100" b="0">
+                <a:solidFill>
+                  <a:srgbClr val="141833"/>
+                </a:solidFill>
+                <a:latin typeface="Helvetica Neue"/>
+              </a:rPr>
+              <a:t>Community Local</a:t>
+            </a:r>
+          </a:p>
+        </p:txBody>
+      </p:sp>
+      <p:sp>
+        <p:nvSpPr>
+          <p:cNvPr id="25" name="Rectangle 24"/>
+          <p:cNvSpPr/>
+          <p:nvPr/>
+        </p:nvSpPr>
+        <p:spPr>
+          <a:xfrm>
+            <a:off x="3383280" y="4178807"/>
+            <a:ext cx="2562757" cy="192024"/>
+          </a:xfrm>
+          <a:prstGeom prst="rect">
+            <a:avLst/>
+          </a:prstGeom>
+          <a:solidFill>
+            <a:srgbClr val="141833"/>
+          </a:solidFill>
+          <a:ln>
+            <a:noFill/>
+          </a:ln>
+          <a:effectLst/>
+        </p:spPr>
+        <p:style>
+          <a:lnRef idx="1">
+            <a:schemeClr val="accent1"/>
+          </a:lnRef>
+          <a:fillRef idx="3">
+            <a:schemeClr val="accent1"/>
+          </a:fillRef>
+          <a:effectRef idx="2">
+            <a:schemeClr val="accent1"/>
+          </a:effectRef>
+          <a:fontRef idx="minor">
+            <a:schemeClr val="lt1"/>
+          </a:fontRef>
+        </p:style>
+        <p:txBody>
+          <a:bodyPr rtlCol="0" anchor="ctr"/>
+          <a:lstStyle/>
+          <a:p>
+            <a:pPr algn="ctr"/>
+          </a:p>
+        </p:txBody>
+      </p:sp>
+      <p:sp>
+        <p:nvSpPr>
+          <p:cNvPr id="26" name="TextBox 25"/>
+          <p:cNvSpPr txBox="1"/>
+          <p:nvPr/>
+        </p:nvSpPr>
+        <p:spPr>
+          <a:xfrm>
+            <a:off x="6037477" y="4151376"/>
+            <a:ext cx="2286000" cy="329184"/>
+          </a:xfrm>
+          <a:prstGeom prst="rect">
+            <a:avLst/>
+          </a:prstGeom>
+          <a:noFill/>
+        </p:spPr>
+        <p:txBody>
+          <a:bodyPr wrap="square" lIns="0" rIns="0" tIns="0" bIns="0">
+            <a:spAutoFit/>
+          </a:bodyPr>
+          <a:lstStyle/>
+          <a:p>
+            <a:r>
+              <a:rPr sz="1000" b="0">
+                <a:solidFill>
+                  <a:srgbClr val="6B7082"/>
+                </a:solidFill>
+                <a:latin typeface="Helvetica Neue"/>
+              </a:rPr>
+              <a:t>18,418   (20 posts · 921 avg)</a:t>
+            </a:r>
+          </a:p>
+        </p:txBody>
+      </p:sp>
+      <p:sp>
+        <p:nvSpPr>
+          <p:cNvPr id="27" name="TextBox 26"/>
+          <p:cNvSpPr txBox="1"/>
+          <p:nvPr/>
+        </p:nvSpPr>
+        <p:spPr>
+          <a:xfrm>
+            <a:off x="731520" y="4480560"/>
+            <a:ext cx="2468880" cy="329184"/>
+          </a:xfrm>
+          <a:prstGeom prst="rect">
+            <a:avLst/>
+          </a:prstGeom>
+          <a:noFill/>
+        </p:spPr>
+        <p:txBody>
+          <a:bodyPr wrap="square" lIns="0" rIns="0" tIns="0" bIns="0">
+            <a:spAutoFit/>
+          </a:bodyPr>
+          <a:lstStyle/>
+          <a:p>
+            <a:r>
+              <a:rPr sz="1100" b="0">
+                <a:solidFill>
+                  <a:srgbClr val="141833"/>
+                </a:solidFill>
+                <a:latin typeface="Helvetica Neue"/>
+              </a:rPr>
+              <a:t>Politics (other)</a:t>
+            </a:r>
+          </a:p>
+        </p:txBody>
+      </p:sp>
+      <p:sp>
+        <p:nvSpPr>
+          <p:cNvPr id="28" name="Rectangle 27"/>
+          <p:cNvSpPr/>
+          <p:nvPr/>
+        </p:nvSpPr>
+        <p:spPr>
+          <a:xfrm>
+            <a:off x="3383280" y="4507992"/>
+            <a:ext cx="2078953" cy="192024"/>
+          </a:xfrm>
+          <a:prstGeom prst="rect">
+            <a:avLst/>
+          </a:prstGeom>
+          <a:solidFill>
+            <a:srgbClr val="2F3C7E"/>
+          </a:solidFill>
+          <a:ln>
+            <a:noFill/>
+          </a:ln>
+          <a:effectLst/>
+        </p:spPr>
+        <p:style>
+          <a:lnRef idx="1">
+            <a:schemeClr val="accent1"/>
+          </a:lnRef>
+          <a:fillRef idx="3">
+            <a:schemeClr val="accent1"/>
+          </a:fillRef>
+          <a:effectRef idx="2">
+            <a:schemeClr val="accent1"/>
+          </a:effectRef>
+          <a:fontRef idx="minor">
+            <a:schemeClr val="lt1"/>
+          </a:fontRef>
+        </p:style>
+        <p:txBody>
+          <a:bodyPr rtlCol="0" anchor="ctr"/>
+          <a:lstStyle/>
+          <a:p>
+            <a:pPr algn="ctr"/>
+          </a:p>
+        </p:txBody>
+      </p:sp>
+      <p:sp>
+        <p:nvSpPr>
+          <p:cNvPr id="29" name="TextBox 28"/>
+          <p:cNvSpPr txBox="1"/>
+          <p:nvPr/>
+        </p:nvSpPr>
+        <p:spPr>
+          <a:xfrm>
+            <a:off x="5553673" y="4480560"/>
+            <a:ext cx="2286000" cy="329184"/>
+          </a:xfrm>
+          <a:prstGeom prst="rect">
+            <a:avLst/>
+          </a:prstGeom>
+          <a:noFill/>
+        </p:spPr>
+        <p:txBody>
+          <a:bodyPr wrap="square" lIns="0" rIns="0" tIns="0" bIns="0">
+            <a:spAutoFit/>
+          </a:bodyPr>
+          <a:lstStyle/>
+          <a:p>
+            <a:r>
+              <a:rPr sz="1000" b="0">
+                <a:solidFill>
+                  <a:srgbClr val="6B7082"/>
+                </a:solidFill>
+                <a:latin typeface="Helvetica Neue"/>
+              </a:rPr>
+              <a:t>14,941   (12 posts · 1,245 avg)</a:t>
+            </a:r>
+          </a:p>
+        </p:txBody>
+      </p:sp>
+      <p:sp>
+        <p:nvSpPr>
+          <p:cNvPr id="30" name="TextBox 29"/>
+          <p:cNvSpPr txBox="1"/>
+          <p:nvPr/>
+        </p:nvSpPr>
+        <p:spPr>
+          <a:xfrm>
+            <a:off x="731520" y="4809744"/>
+            <a:ext cx="2468880" cy="329184"/>
+          </a:xfrm>
+          <a:prstGeom prst="rect">
+            <a:avLst/>
+          </a:prstGeom>
+          <a:noFill/>
+        </p:spPr>
+        <p:txBody>
+          <a:bodyPr wrap="square" lIns="0" rIns="0" tIns="0" bIns="0">
+            <a:spAutoFit/>
+          </a:bodyPr>
+          <a:lstStyle/>
+          <a:p>
+            <a:r>
+              <a:rPr sz="1100" b="0">
+                <a:solidFill>
+                  <a:srgbClr val="141833"/>
+                </a:solidFill>
+                <a:latin typeface="Helvetica Neue"/>
+              </a:rPr>
+              <a:t>AI Fake News</a:t>
+            </a:r>
+          </a:p>
+        </p:txBody>
+      </p:sp>
+      <p:sp>
+        <p:nvSpPr>
+          <p:cNvPr id="31" name="Rectangle 30"/>
+          <p:cNvSpPr/>
+          <p:nvPr/>
+        </p:nvSpPr>
+        <p:spPr>
+          <a:xfrm>
+            <a:off x="3383280" y="4837176"/>
+            <a:ext cx="1797464" cy="192024"/>
+          </a:xfrm>
+          <a:prstGeom prst="rect">
+            <a:avLst/>
+          </a:prstGeom>
+          <a:solidFill>
+            <a:srgbClr val="990011"/>
+          </a:solidFill>
+          <a:ln>
+            <a:noFill/>
+          </a:ln>
+          <a:effectLst/>
+        </p:spPr>
+        <p:style>
+          <a:lnRef idx="1">
+            <a:schemeClr val="accent1"/>
+          </a:lnRef>
+          <a:fillRef idx="3">
+            <a:schemeClr val="accent1"/>
+          </a:fillRef>
+          <a:effectRef idx="2">
+            <a:schemeClr val="accent1"/>
+          </a:effectRef>
+          <a:fontRef idx="minor">
+            <a:schemeClr val="lt1"/>
+          </a:fontRef>
+        </p:style>
+        <p:txBody>
+          <a:bodyPr rtlCol="0" anchor="ctr"/>
+          <a:lstStyle/>
+          <a:p>
+            <a:pPr algn="ctr"/>
+          </a:p>
+        </p:txBody>
+      </p:sp>
+      <p:sp>
+        <p:nvSpPr>
+          <p:cNvPr id="32" name="TextBox 31"/>
+          <p:cNvSpPr txBox="1"/>
+          <p:nvPr/>
+        </p:nvSpPr>
+        <p:spPr>
+          <a:xfrm>
+            <a:off x="5272184" y="4809744"/>
+            <a:ext cx="2286000" cy="329184"/>
+          </a:xfrm>
+          <a:prstGeom prst="rect">
+            <a:avLst/>
+          </a:prstGeom>
+          <a:noFill/>
+        </p:spPr>
+        <p:txBody>
+          <a:bodyPr wrap="square" lIns="0" rIns="0" tIns="0" bIns="0">
+            <a:spAutoFit/>
+          </a:bodyPr>
+          <a:lstStyle/>
+          <a:p>
+            <a:r>
+              <a:rPr sz="1000" b="0">
+                <a:solidFill>
+                  <a:srgbClr val="6B7082"/>
+                </a:solidFill>
+                <a:latin typeface="Helvetica Neue"/>
+              </a:rPr>
+              <a:t>12,918   (7 posts · 1,845 avg)</a:t>
+            </a:r>
+          </a:p>
+        </p:txBody>
+      </p:sp>
+      <p:sp>
+        <p:nvSpPr>
+          <p:cNvPr id="33" name="TextBox 32"/>
+          <p:cNvSpPr txBox="1"/>
+          <p:nvPr/>
+        </p:nvSpPr>
+        <p:spPr>
+          <a:xfrm>
+            <a:off x="731520" y="5138928"/>
+            <a:ext cx="2468880" cy="329184"/>
+          </a:xfrm>
+          <a:prstGeom prst="rect">
+            <a:avLst/>
+          </a:prstGeom>
+          <a:noFill/>
+        </p:spPr>
+        <p:txBody>
+          <a:bodyPr wrap="square" lIns="0" rIns="0" tIns="0" bIns="0">
+            <a:spAutoFit/>
+          </a:bodyPr>
+          <a:lstStyle/>
+          <a:p>
+            <a:r>
+              <a:rPr sz="1100" b="0">
+                <a:solidFill>
+                  <a:srgbClr val="141833"/>
+                </a:solidFill>
+                <a:latin typeface="Helvetica Neue"/>
+              </a:rPr>
+              <a:t>FIFA — Critique</a:t>
+            </a:r>
+          </a:p>
+        </p:txBody>
+      </p:sp>
+      <p:sp>
+        <p:nvSpPr>
+          <p:cNvPr id="34" name="Rectangle 33"/>
+          <p:cNvSpPr/>
+          <p:nvPr/>
+        </p:nvSpPr>
+        <p:spPr>
+          <a:xfrm>
+            <a:off x="3383280" y="5166359"/>
+            <a:ext cx="1639953" cy="192024"/>
+          </a:xfrm>
+          <a:prstGeom prst="rect">
+            <a:avLst/>
+          </a:prstGeom>
+          <a:solidFill>
+            <a:srgbClr val="6B7082"/>
+          </a:solidFill>
+          <a:ln>
+            <a:noFill/>
+          </a:ln>
+          <a:effectLst/>
+        </p:spPr>
+        <p:style>
+          <a:lnRef idx="1">
+            <a:schemeClr val="accent1"/>
+          </a:lnRef>
+          <a:fillRef idx="3">
+            <a:schemeClr val="accent1"/>
+          </a:fillRef>
+          <a:effectRef idx="2">
+            <a:schemeClr val="accent1"/>
+          </a:effectRef>
+          <a:fontRef idx="minor">
+            <a:schemeClr val="lt1"/>
+          </a:fontRef>
+        </p:style>
+        <p:txBody>
+          <a:bodyPr rtlCol="0" anchor="ctr"/>
+          <a:lstStyle/>
+          <a:p>
+            <a:pPr algn="ctr"/>
+          </a:p>
+        </p:txBody>
+      </p:sp>
+      <p:sp>
+        <p:nvSpPr>
+          <p:cNvPr id="35" name="TextBox 34"/>
+          <p:cNvSpPr txBox="1"/>
+          <p:nvPr/>
+        </p:nvSpPr>
+        <p:spPr>
+          <a:xfrm>
+            <a:off x="5114673" y="5138928"/>
+            <a:ext cx="2286000" cy="329184"/>
+          </a:xfrm>
+          <a:prstGeom prst="rect">
+            <a:avLst/>
+          </a:prstGeom>
+          <a:noFill/>
+        </p:spPr>
+        <p:txBody>
+          <a:bodyPr wrap="square" lIns="0" rIns="0" tIns="0" bIns="0">
+            <a:spAutoFit/>
+          </a:bodyPr>
+          <a:lstStyle/>
+          <a:p>
+            <a:r>
+              <a:rPr sz="1000" b="0">
+                <a:solidFill>
+                  <a:srgbClr val="6B7082"/>
+                </a:solidFill>
+                <a:latin typeface="Helvetica Neue"/>
+              </a:rPr>
+              <a:t>11,786   (8 posts · 1,473 avg)</a:t>
+            </a:r>
+          </a:p>
+        </p:txBody>
+      </p:sp>
+      <p:sp>
+        <p:nvSpPr>
+          <p:cNvPr id="36" name="TextBox 35"/>
+          <p:cNvSpPr txBox="1"/>
+          <p:nvPr/>
+        </p:nvSpPr>
+        <p:spPr>
+          <a:xfrm>
+            <a:off x="731520" y="5468112"/>
+            <a:ext cx="2468880" cy="329184"/>
+          </a:xfrm>
+          <a:prstGeom prst="rect">
+            <a:avLst/>
+          </a:prstGeom>
+          <a:noFill/>
+        </p:spPr>
+        <p:txBody>
+          <a:bodyPr wrap="square" lIns="0" rIns="0" tIns="0" bIns="0">
+            <a:spAutoFit/>
+          </a:bodyPr>
+          <a:lstStyle/>
+          <a:p>
+            <a:r>
+              <a:rPr sz="1100" b="0">
+                <a:solidFill>
+                  <a:srgbClr val="141833"/>
+                </a:solidFill>
+                <a:latin typeface="Helvetica Neue"/>
+              </a:rPr>
+              <a:t>Resident Highlight</a:t>
+            </a:r>
+          </a:p>
+        </p:txBody>
+      </p:sp>
+      <p:sp>
+        <p:nvSpPr>
+          <p:cNvPr id="37" name="Rectangle 36"/>
+          <p:cNvSpPr/>
+          <p:nvPr/>
+        </p:nvSpPr>
+        <p:spPr>
+          <a:xfrm>
+            <a:off x="3383280" y="5495543"/>
+            <a:ext cx="1016030" cy="192024"/>
           </a:xfrm>
           <a:prstGeom prst="rect">
             <a:avLst/>
@@ -5896,13 +6680,13 @@
       </p:sp>
       <p:sp>
         <p:nvSpPr>
-          <p:cNvPr id="17" name="TextBox 16"/>
-          <p:cNvSpPr txBox="1"/>
-          <p:nvPr/>
-        </p:nvSpPr>
-        <p:spPr>
-          <a:xfrm>
-            <a:off x="7735194" y="3163824"/>
+          <p:cNvPr id="38" name="TextBox 37"/>
+          <p:cNvSpPr txBox="1"/>
+          <p:nvPr/>
+        </p:nvSpPr>
+        <p:spPr>
+          <a:xfrm>
+            <a:off x="4490750" y="5468112"/>
             <a:ext cx="2286000" cy="329184"/>
           </a:xfrm>
           <a:prstGeom prst="rect">
@@ -5923,20 +6707,20 @@
                 </a:solidFill>
                 <a:latin typeface="Helvetica Neue"/>
               </a:rPr>
-              <a:t>37,026   (27 posts · 1,371 avg)</a:t>
-            </a:r>
-          </a:p>
-        </p:txBody>
-      </p:sp>
-      <p:sp>
-        <p:nvSpPr>
-          <p:cNvPr id="18" name="TextBox 17"/>
-          <p:cNvSpPr txBox="1"/>
-          <p:nvPr/>
-        </p:nvSpPr>
-        <p:spPr>
-          <a:xfrm>
-            <a:off x="731520" y="3493008"/>
+              <a:t>7,302   (6 posts · 1,217 avg)</a:t>
+            </a:r>
+          </a:p>
+        </p:txBody>
+      </p:sp>
+      <p:sp>
+        <p:nvSpPr>
+          <p:cNvPr id="39" name="TextBox 38"/>
+          <p:cNvSpPr txBox="1"/>
+          <p:nvPr/>
+        </p:nvSpPr>
+        <p:spPr>
+          <a:xfrm>
+            <a:off x="731520" y="5797296"/>
             <a:ext cx="2468880" cy="329184"/>
           </a:xfrm>
           <a:prstGeom prst="rect">
@@ -5957,245 +6741,21 @@
                 </a:solidFill>
                 <a:latin typeface="Helvetica Neue"/>
               </a:rPr>
-              <a:t>Trujillo Scandal</a:t>
-            </a:r>
-          </a:p>
-        </p:txBody>
-      </p:sp>
-      <p:sp>
-        <p:nvSpPr>
-          <p:cNvPr id="19" name="Rectangle 18"/>
+              <a:t>Community Events</a:t>
+            </a:r>
+          </a:p>
+        </p:txBody>
+      </p:sp>
+      <p:sp>
+        <p:nvSpPr>
+          <p:cNvPr id="40" name="Rectangle 39"/>
           <p:cNvSpPr/>
           <p:nvPr/>
         </p:nvSpPr>
         <p:spPr>
           <a:xfrm>
-            <a:off x="3383280" y="3520440"/>
-            <a:ext cx="3557069" cy="192024"/>
-          </a:xfrm>
-          <a:prstGeom prst="rect">
-            <a:avLst/>
-          </a:prstGeom>
-          <a:solidFill>
-            <a:srgbClr val="990011"/>
-          </a:solidFill>
-          <a:ln>
-            <a:noFill/>
-          </a:ln>
-          <a:effectLst/>
-        </p:spPr>
-        <p:style>
-          <a:lnRef idx="1">
-            <a:schemeClr val="accent1"/>
-          </a:lnRef>
-          <a:fillRef idx="3">
-            <a:schemeClr val="accent1"/>
-          </a:fillRef>
-          <a:effectRef idx="2">
-            <a:schemeClr val="accent1"/>
-          </a:effectRef>
-          <a:fontRef idx="minor">
-            <a:schemeClr val="lt1"/>
-          </a:fontRef>
-        </p:style>
-        <p:txBody>
-          <a:bodyPr rtlCol="0" anchor="ctr"/>
-          <a:lstStyle/>
-          <a:p>
-            <a:pPr algn="ctr"/>
-          </a:p>
-        </p:txBody>
-      </p:sp>
-      <p:sp>
-        <p:nvSpPr>
-          <p:cNvPr id="20" name="TextBox 19"/>
-          <p:cNvSpPr txBox="1"/>
-          <p:nvPr/>
-        </p:nvSpPr>
-        <p:spPr>
-          <a:xfrm>
-            <a:off x="7031789" y="3493008"/>
-            <a:ext cx="2286000" cy="329184"/>
-          </a:xfrm>
-          <a:prstGeom prst="rect">
-            <a:avLst/>
-          </a:prstGeom>
-          <a:noFill/>
-        </p:spPr>
-        <p:txBody>
-          <a:bodyPr wrap="square" lIns="0" rIns="0" tIns="0" bIns="0">
-            <a:spAutoFit/>
-          </a:bodyPr>
-          <a:lstStyle/>
-          <a:p>
-            <a:r>
-              <a:rPr sz="1000" b="0">
-                <a:solidFill>
-                  <a:srgbClr val="6B7082"/>
-                </a:solidFill>
-                <a:latin typeface="Helvetica Neue"/>
-              </a:rPr>
-              <a:t>30,913   (12 posts · 2,576 avg)</a:t>
-            </a:r>
-          </a:p>
-        </p:txBody>
-      </p:sp>
-      <p:sp>
-        <p:nvSpPr>
-          <p:cNvPr id="21" name="TextBox 20"/>
-          <p:cNvSpPr txBox="1"/>
-          <p:nvPr/>
-        </p:nvSpPr>
-        <p:spPr>
-          <a:xfrm>
-            <a:off x="731520" y="3822192"/>
-            <a:ext cx="2468880" cy="329184"/>
-          </a:xfrm>
-          <a:prstGeom prst="rect">
-            <a:avLst/>
-          </a:prstGeom>
-          <a:noFill/>
-        </p:spPr>
-        <p:txBody>
-          <a:bodyPr wrap="square" lIns="0" rIns="0" tIns="0" bIns="0">
-            <a:spAutoFit/>
-          </a:bodyPr>
-          <a:lstStyle/>
-          <a:p>
-            <a:r>
-              <a:rPr sz="1100" b="0">
-                <a:solidFill>
-                  <a:srgbClr val="141833"/>
-                </a:solidFill>
-                <a:latin typeface="Helvetica Neue"/>
-              </a:rPr>
-              <a:t>Council Chaos</a:t>
-            </a:r>
-          </a:p>
-        </p:txBody>
-      </p:sp>
-      <p:sp>
-        <p:nvSpPr>
-          <p:cNvPr id="22" name="Rectangle 21"/>
-          <p:cNvSpPr/>
-          <p:nvPr/>
-        </p:nvSpPr>
-        <p:spPr>
-          <a:xfrm>
-            <a:off x="3383280" y="3849624"/>
-            <a:ext cx="2408124" cy="192024"/>
-          </a:xfrm>
-          <a:prstGeom prst="rect">
-            <a:avLst/>
-          </a:prstGeom>
-          <a:solidFill>
-            <a:srgbClr val="990011"/>
-          </a:solidFill>
-          <a:ln>
-            <a:noFill/>
-          </a:ln>
-          <a:effectLst/>
-        </p:spPr>
-        <p:style>
-          <a:lnRef idx="1">
-            <a:schemeClr val="accent1"/>
-          </a:lnRef>
-          <a:fillRef idx="3">
-            <a:schemeClr val="accent1"/>
-          </a:fillRef>
-          <a:effectRef idx="2">
-            <a:schemeClr val="accent1"/>
-          </a:effectRef>
-          <a:fontRef idx="minor">
-            <a:schemeClr val="lt1"/>
-          </a:fontRef>
-        </p:style>
-        <p:txBody>
-          <a:bodyPr rtlCol="0" anchor="ctr"/>
-          <a:lstStyle/>
-          <a:p>
-            <a:pPr algn="ctr"/>
-          </a:p>
-        </p:txBody>
-      </p:sp>
-      <p:sp>
-        <p:nvSpPr>
-          <p:cNvPr id="23" name="TextBox 22"/>
-          <p:cNvSpPr txBox="1"/>
-          <p:nvPr/>
-        </p:nvSpPr>
-        <p:spPr>
-          <a:xfrm>
-            <a:off x="5882844" y="3822192"/>
-            <a:ext cx="2286000" cy="329184"/>
-          </a:xfrm>
-          <a:prstGeom prst="rect">
-            <a:avLst/>
-          </a:prstGeom>
-          <a:noFill/>
-        </p:spPr>
-        <p:txBody>
-          <a:bodyPr wrap="square" lIns="0" rIns="0" tIns="0" bIns="0">
-            <a:spAutoFit/>
-          </a:bodyPr>
-          <a:lstStyle/>
-          <a:p>
-            <a:r>
-              <a:rPr sz="1000" b="0">
-                <a:solidFill>
-                  <a:srgbClr val="6B7082"/>
-                </a:solidFill>
-                <a:latin typeface="Helvetica Neue"/>
-              </a:rPr>
-              <a:t>20,928   (5 posts · 4,186 avg)</a:t>
-            </a:r>
-          </a:p>
-        </p:txBody>
-      </p:sp>
-      <p:sp>
-        <p:nvSpPr>
-          <p:cNvPr id="24" name="TextBox 23"/>
-          <p:cNvSpPr txBox="1"/>
-          <p:nvPr/>
-        </p:nvSpPr>
-        <p:spPr>
-          <a:xfrm>
-            <a:off x="731520" y="4151376"/>
-            <a:ext cx="2468880" cy="329184"/>
-          </a:xfrm>
-          <a:prstGeom prst="rect">
-            <a:avLst/>
-          </a:prstGeom>
-          <a:noFill/>
-        </p:spPr>
-        <p:txBody>
-          <a:bodyPr wrap="square" lIns="0" rIns="0" tIns="0" bIns="0">
-            <a:spAutoFit/>
-          </a:bodyPr>
-          <a:lstStyle/>
-          <a:p>
-            <a:r>
-              <a:rPr sz="1100" b="0">
-                <a:solidFill>
-                  <a:srgbClr val="141833"/>
-                </a:solidFill>
-                <a:latin typeface="Helvetica Neue"/>
-              </a:rPr>
-              <a:t>Community Local</a:t>
-            </a:r>
-          </a:p>
-        </p:txBody>
-      </p:sp>
-      <p:sp>
-        <p:nvSpPr>
-          <p:cNvPr id="25" name="Rectangle 24"/>
-          <p:cNvSpPr/>
-          <p:nvPr/>
-        </p:nvSpPr>
-        <p:spPr>
-          <a:xfrm>
-            <a:off x="3383280" y="4178807"/>
-            <a:ext cx="1909538" cy="192024"/>
+            <a:off x="3383280" y="5824728"/>
+            <a:ext cx="926282" cy="192024"/>
           </a:xfrm>
           <a:prstGeom prst="rect">
             <a:avLst/>
@@ -6232,13 +6792,13 @@
       </p:sp>
       <p:sp>
         <p:nvSpPr>
-          <p:cNvPr id="26" name="TextBox 25"/>
-          <p:cNvSpPr txBox="1"/>
-          <p:nvPr/>
-        </p:nvSpPr>
-        <p:spPr>
-          <a:xfrm>
-            <a:off x="5384258" y="4151376"/>
+          <p:cNvPr id="41" name="TextBox 40"/>
+          <p:cNvSpPr txBox="1"/>
+          <p:nvPr/>
+        </p:nvSpPr>
+        <p:spPr>
+          <a:xfrm>
+            <a:off x="4401002" y="5797296"/>
             <a:ext cx="2286000" cy="329184"/>
           </a:xfrm>
           <a:prstGeom prst="rect">
@@ -6259,567 +6819,7 @@
                 </a:solidFill>
                 <a:latin typeface="Helvetica Neue"/>
               </a:rPr>
-              <a:t>16,595   (15 posts · 1,106 avg)</a:t>
-            </a:r>
-          </a:p>
-        </p:txBody>
-      </p:sp>
-      <p:sp>
-        <p:nvSpPr>
-          <p:cNvPr id="27" name="TextBox 26"/>
-          <p:cNvSpPr txBox="1"/>
-          <p:nvPr/>
-        </p:nvSpPr>
-        <p:spPr>
-          <a:xfrm>
-            <a:off x="731520" y="4480560"/>
-            <a:ext cx="2468880" cy="329184"/>
-          </a:xfrm>
-          <a:prstGeom prst="rect">
-            <a:avLst/>
-          </a:prstGeom>
-          <a:noFill/>
-        </p:spPr>
-        <p:txBody>
-          <a:bodyPr wrap="square" lIns="0" rIns="0" tIns="0" bIns="0">
-            <a:spAutoFit/>
-          </a:bodyPr>
-          <a:lstStyle/>
-          <a:p>
-            <a:r>
-              <a:rPr sz="1100" b="0">
-                <a:solidFill>
-                  <a:srgbClr val="141833"/>
-                </a:solidFill>
-                <a:latin typeface="Helvetica Neue"/>
-              </a:rPr>
-              <a:t>Politics (other)</a:t>
-            </a:r>
-          </a:p>
-        </p:txBody>
-      </p:sp>
-      <p:sp>
-        <p:nvSpPr>
-          <p:cNvPr id="28" name="Rectangle 27"/>
-          <p:cNvSpPr/>
-          <p:nvPr/>
-        </p:nvSpPr>
-        <p:spPr>
-          <a:xfrm>
-            <a:off x="3383280" y="4507992"/>
-            <a:ext cx="1719217" cy="192024"/>
-          </a:xfrm>
-          <a:prstGeom prst="rect">
-            <a:avLst/>
-          </a:prstGeom>
-          <a:solidFill>
-            <a:srgbClr val="2F3C7E"/>
-          </a:solidFill>
-          <a:ln>
-            <a:noFill/>
-          </a:ln>
-          <a:effectLst/>
-        </p:spPr>
-        <p:style>
-          <a:lnRef idx="1">
-            <a:schemeClr val="accent1"/>
-          </a:lnRef>
-          <a:fillRef idx="3">
-            <a:schemeClr val="accent1"/>
-          </a:fillRef>
-          <a:effectRef idx="2">
-            <a:schemeClr val="accent1"/>
-          </a:effectRef>
-          <a:fontRef idx="minor">
-            <a:schemeClr val="lt1"/>
-          </a:fontRef>
-        </p:style>
-        <p:txBody>
-          <a:bodyPr rtlCol="0" anchor="ctr"/>
-          <a:lstStyle/>
-          <a:p>
-            <a:pPr algn="ctr"/>
-          </a:p>
-        </p:txBody>
-      </p:sp>
-      <p:sp>
-        <p:nvSpPr>
-          <p:cNvPr id="29" name="TextBox 28"/>
-          <p:cNvSpPr txBox="1"/>
-          <p:nvPr/>
-        </p:nvSpPr>
-        <p:spPr>
-          <a:xfrm>
-            <a:off x="5193937" y="4480560"/>
-            <a:ext cx="2286000" cy="329184"/>
-          </a:xfrm>
-          <a:prstGeom prst="rect">
-            <a:avLst/>
-          </a:prstGeom>
-          <a:noFill/>
-        </p:spPr>
-        <p:txBody>
-          <a:bodyPr wrap="square" lIns="0" rIns="0" tIns="0" bIns="0">
-            <a:spAutoFit/>
-          </a:bodyPr>
-          <a:lstStyle/>
-          <a:p>
-            <a:r>
-              <a:rPr sz="1000" b="0">
-                <a:solidFill>
-                  <a:srgbClr val="6B7082"/>
-                </a:solidFill>
-                <a:latin typeface="Helvetica Neue"/>
-              </a:rPr>
-              <a:t>14,941   (12 posts · 1,245 avg)</a:t>
-            </a:r>
-          </a:p>
-        </p:txBody>
-      </p:sp>
-      <p:sp>
-        <p:nvSpPr>
-          <p:cNvPr id="30" name="TextBox 29"/>
-          <p:cNvSpPr txBox="1"/>
-          <p:nvPr/>
-        </p:nvSpPr>
-        <p:spPr>
-          <a:xfrm>
-            <a:off x="731520" y="4809744"/>
-            <a:ext cx="2468880" cy="329184"/>
-          </a:xfrm>
-          <a:prstGeom prst="rect">
-            <a:avLst/>
-          </a:prstGeom>
-          <a:noFill/>
-        </p:spPr>
-        <p:txBody>
-          <a:bodyPr wrap="square" lIns="0" rIns="0" tIns="0" bIns="0">
-            <a:spAutoFit/>
-          </a:bodyPr>
-          <a:lstStyle/>
-          <a:p>
-            <a:r>
-              <a:rPr sz="1100" b="0">
-                <a:solidFill>
-                  <a:srgbClr val="141833"/>
-                </a:solidFill>
-                <a:latin typeface="Helvetica Neue"/>
-              </a:rPr>
-              <a:t>AI Fake News</a:t>
-            </a:r>
-          </a:p>
-        </p:txBody>
-      </p:sp>
-      <p:sp>
-        <p:nvSpPr>
-          <p:cNvPr id="31" name="Rectangle 30"/>
-          <p:cNvSpPr/>
-          <p:nvPr/>
-        </p:nvSpPr>
-        <p:spPr>
-          <a:xfrm>
-            <a:off x="3383280" y="4837176"/>
-            <a:ext cx="1486436" cy="192024"/>
-          </a:xfrm>
-          <a:prstGeom prst="rect">
-            <a:avLst/>
-          </a:prstGeom>
-          <a:solidFill>
-            <a:srgbClr val="990011"/>
-          </a:solidFill>
-          <a:ln>
-            <a:noFill/>
-          </a:ln>
-          <a:effectLst/>
-        </p:spPr>
-        <p:style>
-          <a:lnRef idx="1">
-            <a:schemeClr val="accent1"/>
-          </a:lnRef>
-          <a:fillRef idx="3">
-            <a:schemeClr val="accent1"/>
-          </a:fillRef>
-          <a:effectRef idx="2">
-            <a:schemeClr val="accent1"/>
-          </a:effectRef>
-          <a:fontRef idx="minor">
-            <a:schemeClr val="lt1"/>
-          </a:fontRef>
-        </p:style>
-        <p:txBody>
-          <a:bodyPr rtlCol="0" anchor="ctr"/>
-          <a:lstStyle/>
-          <a:p>
-            <a:pPr algn="ctr"/>
-          </a:p>
-        </p:txBody>
-      </p:sp>
-      <p:sp>
-        <p:nvSpPr>
-          <p:cNvPr id="32" name="TextBox 31"/>
-          <p:cNvSpPr txBox="1"/>
-          <p:nvPr/>
-        </p:nvSpPr>
-        <p:spPr>
-          <a:xfrm>
-            <a:off x="4961156" y="4809744"/>
-            <a:ext cx="2286000" cy="329184"/>
-          </a:xfrm>
-          <a:prstGeom prst="rect">
-            <a:avLst/>
-          </a:prstGeom>
-          <a:noFill/>
-        </p:spPr>
-        <p:txBody>
-          <a:bodyPr wrap="square" lIns="0" rIns="0" tIns="0" bIns="0">
-            <a:spAutoFit/>
-          </a:bodyPr>
-          <a:lstStyle/>
-          <a:p>
-            <a:r>
-              <a:rPr sz="1000" b="0">
-                <a:solidFill>
-                  <a:srgbClr val="6B7082"/>
-                </a:solidFill>
-                <a:latin typeface="Helvetica Neue"/>
-              </a:rPr>
-              <a:t>12,918   (7 posts · 1,845 avg)</a:t>
-            </a:r>
-          </a:p>
-        </p:txBody>
-      </p:sp>
-      <p:sp>
-        <p:nvSpPr>
-          <p:cNvPr id="33" name="TextBox 32"/>
-          <p:cNvSpPr txBox="1"/>
-          <p:nvPr/>
-        </p:nvSpPr>
-        <p:spPr>
-          <a:xfrm>
-            <a:off x="731520" y="5138928"/>
-            <a:ext cx="2468880" cy="329184"/>
-          </a:xfrm>
-          <a:prstGeom prst="rect">
-            <a:avLst/>
-          </a:prstGeom>
-          <a:noFill/>
-        </p:spPr>
-        <p:txBody>
-          <a:bodyPr wrap="square" lIns="0" rIns="0" tIns="0" bIns="0">
-            <a:spAutoFit/>
-          </a:bodyPr>
-          <a:lstStyle/>
-          <a:p>
-            <a:r>
-              <a:rPr sz="1100" b="0">
-                <a:solidFill>
-                  <a:srgbClr val="141833"/>
-                </a:solidFill>
-                <a:latin typeface="Helvetica Neue"/>
-              </a:rPr>
-              <a:t>FIFA — Critique</a:t>
-            </a:r>
-          </a:p>
-        </p:txBody>
-      </p:sp>
-      <p:sp>
-        <p:nvSpPr>
-          <p:cNvPr id="34" name="Rectangle 33"/>
-          <p:cNvSpPr/>
-          <p:nvPr/>
-        </p:nvSpPr>
-        <p:spPr>
-          <a:xfrm>
-            <a:off x="3383280" y="5166359"/>
-            <a:ext cx="1356181" cy="192024"/>
-          </a:xfrm>
-          <a:prstGeom prst="rect">
-            <a:avLst/>
-          </a:prstGeom>
-          <a:solidFill>
-            <a:srgbClr val="6B7082"/>
-          </a:solidFill>
-          <a:ln>
-            <a:noFill/>
-          </a:ln>
-          <a:effectLst/>
-        </p:spPr>
-        <p:style>
-          <a:lnRef idx="1">
-            <a:schemeClr val="accent1"/>
-          </a:lnRef>
-          <a:fillRef idx="3">
-            <a:schemeClr val="accent1"/>
-          </a:fillRef>
-          <a:effectRef idx="2">
-            <a:schemeClr val="accent1"/>
-          </a:effectRef>
-          <a:fontRef idx="minor">
-            <a:schemeClr val="lt1"/>
-          </a:fontRef>
-        </p:style>
-        <p:txBody>
-          <a:bodyPr rtlCol="0" anchor="ctr"/>
-          <a:lstStyle/>
-          <a:p>
-            <a:pPr algn="ctr"/>
-          </a:p>
-        </p:txBody>
-      </p:sp>
-      <p:sp>
-        <p:nvSpPr>
-          <p:cNvPr id="35" name="TextBox 34"/>
-          <p:cNvSpPr txBox="1"/>
-          <p:nvPr/>
-        </p:nvSpPr>
-        <p:spPr>
-          <a:xfrm>
-            <a:off x="4830901" y="5138928"/>
-            <a:ext cx="2286000" cy="329184"/>
-          </a:xfrm>
-          <a:prstGeom prst="rect">
-            <a:avLst/>
-          </a:prstGeom>
-          <a:noFill/>
-        </p:spPr>
-        <p:txBody>
-          <a:bodyPr wrap="square" lIns="0" rIns="0" tIns="0" bIns="0">
-            <a:spAutoFit/>
-          </a:bodyPr>
-          <a:lstStyle/>
-          <a:p>
-            <a:r>
-              <a:rPr sz="1000" b="0">
-                <a:solidFill>
-                  <a:srgbClr val="6B7082"/>
-                </a:solidFill>
-                <a:latin typeface="Helvetica Neue"/>
-              </a:rPr>
-              <a:t>11,786   (8 posts · 1,473 avg)</a:t>
-            </a:r>
-          </a:p>
-        </p:txBody>
-      </p:sp>
-      <p:sp>
-        <p:nvSpPr>
-          <p:cNvPr id="36" name="TextBox 35"/>
-          <p:cNvSpPr txBox="1"/>
-          <p:nvPr/>
-        </p:nvSpPr>
-        <p:spPr>
-          <a:xfrm>
-            <a:off x="731520" y="5468112"/>
-            <a:ext cx="2468880" cy="329184"/>
-          </a:xfrm>
-          <a:prstGeom prst="rect">
-            <a:avLst/>
-          </a:prstGeom>
-          <a:noFill/>
-        </p:spPr>
-        <p:txBody>
-          <a:bodyPr wrap="square" lIns="0" rIns="0" tIns="0" bIns="0">
-            <a:spAutoFit/>
-          </a:bodyPr>
-          <a:lstStyle/>
-          <a:p>
-            <a:r>
-              <a:rPr sz="1100" b="0">
-                <a:solidFill>
-                  <a:srgbClr val="141833"/>
-                </a:solidFill>
-                <a:latin typeface="Helvetica Neue"/>
-              </a:rPr>
-              <a:t>Resident Highlight</a:t>
-            </a:r>
-          </a:p>
-        </p:txBody>
-      </p:sp>
-      <p:sp>
-        <p:nvSpPr>
-          <p:cNvPr id="37" name="Rectangle 36"/>
-          <p:cNvSpPr/>
-          <p:nvPr/>
-        </p:nvSpPr>
-        <p:spPr>
-          <a:xfrm>
-            <a:off x="3383280" y="5495543"/>
-            <a:ext cx="932388" cy="192024"/>
-          </a:xfrm>
-          <a:prstGeom prst="rect">
-            <a:avLst/>
-          </a:prstGeom>
-          <a:solidFill>
-            <a:srgbClr val="1B7A43"/>
-          </a:solidFill>
-          <a:ln>
-            <a:noFill/>
-          </a:ln>
-          <a:effectLst/>
-        </p:spPr>
-        <p:style>
-          <a:lnRef idx="1">
-            <a:schemeClr val="accent1"/>
-          </a:lnRef>
-          <a:fillRef idx="3">
-            <a:schemeClr val="accent1"/>
-          </a:fillRef>
-          <a:effectRef idx="2">
-            <a:schemeClr val="accent1"/>
-          </a:effectRef>
-          <a:fontRef idx="minor">
-            <a:schemeClr val="lt1"/>
-          </a:fontRef>
-        </p:style>
-        <p:txBody>
-          <a:bodyPr rtlCol="0" anchor="ctr"/>
-          <a:lstStyle/>
-          <a:p>
-            <a:pPr algn="ctr"/>
-          </a:p>
-        </p:txBody>
-      </p:sp>
-      <p:sp>
-        <p:nvSpPr>
-          <p:cNvPr id="38" name="TextBox 37"/>
-          <p:cNvSpPr txBox="1"/>
-          <p:nvPr/>
-        </p:nvSpPr>
-        <p:spPr>
-          <a:xfrm>
-            <a:off x="4407108" y="5468112"/>
-            <a:ext cx="2286000" cy="329184"/>
-          </a:xfrm>
-          <a:prstGeom prst="rect">
-            <a:avLst/>
-          </a:prstGeom>
-          <a:noFill/>
-        </p:spPr>
-        <p:txBody>
-          <a:bodyPr wrap="square" lIns="0" rIns="0" tIns="0" bIns="0">
-            <a:spAutoFit/>
-          </a:bodyPr>
-          <a:lstStyle/>
-          <a:p>
-            <a:r>
-              <a:rPr sz="1000" b="0">
-                <a:solidFill>
-                  <a:srgbClr val="6B7082"/>
-                </a:solidFill>
-                <a:latin typeface="Helvetica Neue"/>
-              </a:rPr>
-              <a:t>8,103   (6 posts · 1,350 avg)</a:t>
-            </a:r>
-          </a:p>
-        </p:txBody>
-      </p:sp>
-      <p:sp>
-        <p:nvSpPr>
-          <p:cNvPr id="39" name="TextBox 38"/>
-          <p:cNvSpPr txBox="1"/>
-          <p:nvPr/>
-        </p:nvSpPr>
-        <p:spPr>
-          <a:xfrm>
-            <a:off x="731520" y="5797296"/>
-            <a:ext cx="2468880" cy="329184"/>
-          </a:xfrm>
-          <a:prstGeom prst="rect">
-            <a:avLst/>
-          </a:prstGeom>
-          <a:noFill/>
-        </p:spPr>
-        <p:txBody>
-          <a:bodyPr wrap="square" lIns="0" rIns="0" tIns="0" bIns="0">
-            <a:spAutoFit/>
-          </a:bodyPr>
-          <a:lstStyle/>
-          <a:p>
-            <a:r>
-              <a:rPr sz="1100" b="0">
-                <a:solidFill>
-                  <a:srgbClr val="141833"/>
-                </a:solidFill>
-                <a:latin typeface="Helvetica Neue"/>
-              </a:rPr>
-              <a:t>Community Events</a:t>
-            </a:r>
-          </a:p>
-        </p:txBody>
-      </p:sp>
-      <p:sp>
-        <p:nvSpPr>
-          <p:cNvPr id="40" name="Rectangle 39"/>
-          <p:cNvSpPr/>
-          <p:nvPr/>
-        </p:nvSpPr>
-        <p:spPr>
-          <a:xfrm>
-            <a:off x="3383280" y="5824728"/>
-            <a:ext cx="848389" cy="192024"/>
-          </a:xfrm>
-          <a:prstGeom prst="rect">
-            <a:avLst/>
-          </a:prstGeom>
-          <a:solidFill>
-            <a:srgbClr val="141833"/>
-          </a:solidFill>
-          <a:ln>
-            <a:noFill/>
-          </a:ln>
-          <a:effectLst/>
-        </p:spPr>
-        <p:style>
-          <a:lnRef idx="1">
-            <a:schemeClr val="accent1"/>
-          </a:lnRef>
-          <a:fillRef idx="3">
-            <a:schemeClr val="accent1"/>
-          </a:fillRef>
-          <a:effectRef idx="2">
-            <a:schemeClr val="accent1"/>
-          </a:effectRef>
-          <a:fontRef idx="minor">
-            <a:schemeClr val="lt1"/>
-          </a:fontRef>
-        </p:style>
-        <p:txBody>
-          <a:bodyPr rtlCol="0" anchor="ctr"/>
-          <a:lstStyle/>
-          <a:p>
-            <a:pPr algn="ctr"/>
-          </a:p>
-        </p:txBody>
-      </p:sp>
-      <p:sp>
-        <p:nvSpPr>
-          <p:cNvPr id="41" name="TextBox 40"/>
-          <p:cNvSpPr txBox="1"/>
-          <p:nvPr/>
-        </p:nvSpPr>
-        <p:spPr>
-          <a:xfrm>
-            <a:off x="4323109" y="5797296"/>
-            <a:ext cx="2286000" cy="329184"/>
-          </a:xfrm>
-          <a:prstGeom prst="rect">
-            <a:avLst/>
-          </a:prstGeom>
-          <a:noFill/>
-        </p:spPr>
-        <p:txBody>
-          <a:bodyPr wrap="square" lIns="0" rIns="0" tIns="0" bIns="0">
-            <a:spAutoFit/>
-          </a:bodyPr>
-          <a:lstStyle/>
-          <a:p>
-            <a:r>
-              <a:rPr sz="1000" b="0">
-                <a:solidFill>
-                  <a:srgbClr val="6B7082"/>
-                </a:solidFill>
-                <a:latin typeface="Helvetica Neue"/>
-              </a:rPr>
-              <a:t>7,373   (16 posts · 461 avg)</a:t>
+              <a:t>6,657   (16 posts · 416 avg)</a:t>
             </a:r>
           </a:p>
         </p:txBody>
@@ -7737,7 +7737,7 @@
                 </a:solidFill>
                 <a:latin typeface="Helvetica Neue"/>
               </a:rPr>
-              <a:t>27,200</a:t>
+              <a:t>27,300</a:t>
             </a:r>
           </a:p>
         </p:txBody>
@@ -7771,7 +7771,7 @@
                 </a:solidFill>
                 <a:latin typeface="Helvetica Neue"/>
               </a:rPr>
-              <a:t>800</a:t>
+              <a:t>805</a:t>
             </a:r>
           </a:p>
         </p:txBody>
@@ -7917,7 +7917,7 @@
                 </a:solidFill>
                 <a:latin typeface="Helvetica Neue"/>
               </a:rPr>
-              <a:t>IG</a:t>
+              <a:t>TT</a:t>
             </a:r>
           </a:p>
         </p:txBody>
@@ -7951,7 +7951,7 @@
                 </a:solidFill>
                 <a:latin typeface="Helvetica Neue"/>
               </a:rPr>
-              <a:t>25,000+ people gathered for a watch party at Stonewood Mall! Despite the $300k c</a:t>
+              <a:t>Mama Lu's is coming to Downey! Asian community favorite, famous for their tender</a:t>
             </a:r>
           </a:p>
         </p:txBody>
@@ -7985,7 +7985,7 @@
                 </a:solidFill>
                 <a:latin typeface="Helvetica Neue"/>
               </a:rPr>
-              <a:t>15,935</a:t>
+              <a:t>13,600</a:t>
             </a:r>
           </a:p>
         </p:txBody>
@@ -8019,7 +8019,7 @@
                 </a:solidFill>
                 <a:latin typeface="Helvetica Neue"/>
               </a:rPr>
-              <a:t>262</a:t>
+              <a:t>951</a:t>
             </a:r>
           </a:p>
         </p:txBody>
@@ -8053,7 +8053,7 @@
                 </a:solidFill>
                 <a:latin typeface="Helvetica Neue"/>
               </a:rPr>
-              <a:t>Fifa Positive</a:t>
+              <a:t>Food</a:t>
             </a:r>
           </a:p>
         </p:txBody>
@@ -8199,7 +8199,7 @@
                 </a:solidFill>
                 <a:latin typeface="Helvetica Neue"/>
               </a:rPr>
-              <a:t>Mama Lu's is coming to Downey! Asian community favorite, famous for their tender</a:t>
+              <a:t>Grew up in Huntington Park and still own property there. The city's o...</a:t>
             </a:r>
           </a:p>
         </p:txBody>
@@ -8233,7 +8233,7 @@
                 </a:solidFill>
                 <a:latin typeface="Helvetica Neue"/>
               </a:rPr>
-              <a:t>13,600</a:t>
+              <a:t>9,839</a:t>
             </a:r>
           </a:p>
         </p:txBody>
@@ -8267,7 +8267,7 @@
                 </a:solidFill>
                 <a:latin typeface="Helvetica Neue"/>
               </a:rPr>
-              <a:t>951</a:t>
+              <a:t>548</a:t>
             </a:r>
           </a:p>
         </p:txBody>
@@ -8301,7 +8301,7 @@
                 </a:solidFill>
                 <a:latin typeface="Helvetica Neue"/>
               </a:rPr>
-              <a:t>Food</a:t>
+              <a:t>Trujillo Scandal</a:t>
             </a:r>
           </a:p>
         </p:txBody>
@@ -8369,7 +8369,7 @@
                 </a:solidFill>
                 <a:latin typeface="Helvetica Neue"/>
               </a:rPr>
-              <a:t>TT</a:t>
+              <a:t>IG</a:t>
             </a:r>
           </a:p>
         </p:txBody>
@@ -8403,7 +8403,7 @@
                 </a:solidFill>
                 <a:latin typeface="Helvetica Neue"/>
               </a:rPr>
-              <a:t>Grew up in Huntington Park and still own property there. The city's o...</a:t>
+              <a:t>25,000+ people gathered for a watch party at Stonewood Mall! Despite the $300k c</a:t>
             </a:r>
           </a:p>
         </p:txBody>
@@ -8437,7 +8437,7 @@
                 </a:solidFill>
                 <a:latin typeface="Helvetica Neue"/>
               </a:rPr>
-              <a:t>9,839</a:t>
+              <a:t>7,180</a:t>
             </a:r>
           </a:p>
         </p:txBody>
@@ -8471,7 +8471,7 @@
                 </a:solidFill>
                 <a:latin typeface="Helvetica Neue"/>
               </a:rPr>
-              <a:t>548</a:t>
+              <a:t>264</a:t>
             </a:r>
           </a:p>
         </p:txBody>
@@ -8505,7 +8505,7 @@
                 </a:solidFill>
                 <a:latin typeface="Helvetica Neue"/>
               </a:rPr>
-              <a:t>Trujillo Scandal</a:t>
+              <a:t>Fifa Positive</a:t>
             </a:r>
           </a:p>
         </p:txBody>
@@ -9137,7 +9137,7 @@
                 </a:solidFill>
                 <a:latin typeface="Helvetica Neue"/>
               </a:rPr>
-              <a:t>6,341</a:t>
+              <a:t>6,355</a:t>
             </a:r>
           </a:p>
         </p:txBody>
@@ -9171,7 +9171,7 @@
                 </a:solidFill>
                 <a:latin typeface="Helvetica Neue"/>
               </a:rPr>
-              <a:t>45</a:t>
+              <a:t>46</a:t>
             </a:r>
           </a:p>
         </p:txBody>

--- a/OVERALL_REPORT.pptx
+++ b/OVERALL_REPORT.pptx
@@ -3277,7 +3277,7 @@
                 </a:solidFill>
                 <a:latin typeface="Georgia"/>
               </a:rPr>
-              <a:t>Since Jun 8, 2026 · 2026-07-22</a:t>
+              <a:t>Since Jun 8, 2026 · 2026-07-24</a:t>
             </a:r>
           </a:p>
         </p:txBody>
@@ -3578,7 +3578,7 @@
                 </a:solidFill>
                 <a:latin typeface="Georgia"/>
               </a:rPr>
-              <a:t>316,082</a:t>
+              <a:t>351,057</a:t>
             </a:r>
           </a:p>
         </p:txBody>
@@ -3769,7 +3769,7 @@
                 </a:solidFill>
                 <a:latin typeface="Georgia"/>
               </a:rPr>
-              <a:t>246</a:t>
+              <a:t>258</a:t>
             </a:r>
           </a:p>
         </p:txBody>
@@ -3925,7 +3925,7 @@
                 </a:solidFill>
                 <a:latin typeface="Georgia"/>
               </a:rPr>
-              <a:t>10,311</a:t>
+              <a:t>12,454</a:t>
             </a:r>
           </a:p>
         </p:txBody>
@@ -4081,7 +4081,7 @@
                 </a:solidFill>
                 <a:latin typeface="Georgia"/>
               </a:rPr>
-              <a:t>1,284</a:t>
+              <a:t>1,360</a:t>
             </a:r>
           </a:p>
         </p:txBody>
@@ -4469,7 +4469,7 @@
                 </a:solidFill>
                 <a:latin typeface="Helvetica Neue"/>
               </a:rPr>
-              <a:t>80 posts</a:t>
+              <a:t>84 posts</a:t>
             </a:r>
           </a:p>
         </p:txBody>
@@ -4503,7 +4503,7 @@
                 </a:solidFill>
                 <a:latin typeface="Helvetica Neue"/>
               </a:rPr>
-              <a:t>1,115 avg views/post</a:t>
+              <a:t>1,062 avg views/post</a:t>
             </a:r>
           </a:p>
         </p:txBody>
@@ -4659,7 +4659,7 @@
                 </a:solidFill>
                 <a:latin typeface="Georgia"/>
               </a:rPr>
-              <a:t>140,103</a:t>
+              <a:t>171,928</a:t>
             </a:r>
           </a:p>
         </p:txBody>
@@ -4727,7 +4727,7 @@
                 </a:solidFill>
                 <a:latin typeface="Helvetica Neue"/>
               </a:rPr>
-              <a:t>71 posts</a:t>
+              <a:t>75 posts</a:t>
             </a:r>
           </a:p>
         </p:txBody>
@@ -4761,7 +4761,7 @@
                 </a:solidFill>
                 <a:latin typeface="Helvetica Neue"/>
               </a:rPr>
-              <a:t>1,973 avg views/post</a:t>
+              <a:t>2,292 avg views/post</a:t>
             </a:r>
           </a:p>
         </p:txBody>
@@ -4917,7 +4917,7 @@
                 </a:solidFill>
                 <a:latin typeface="Georgia"/>
               </a:rPr>
-              <a:t>85,853</a:t>
+              <a:t>88,976</a:t>
             </a:r>
           </a:p>
         </p:txBody>
@@ -4985,7 +4985,7 @@
                 </a:solidFill>
                 <a:latin typeface="Helvetica Neue"/>
               </a:rPr>
-              <a:t>87 posts</a:t>
+              <a:t>91 posts</a:t>
             </a:r>
           </a:p>
         </p:txBody>
@@ -5019,7 +5019,7 @@
                 </a:solidFill>
                 <a:latin typeface="Helvetica Neue"/>
               </a:rPr>
-              <a:t>987 avg views/post</a:t>
+              <a:t>978 avg views/post</a:t>
             </a:r>
           </a:p>
         </p:txBody>
@@ -5175,7 +5175,7 @@
                 </a:solidFill>
                 <a:latin typeface="Georgia"/>
               </a:rPr>
-              <a:t>954</a:t>
+              <a:t>981</a:t>
             </a:r>
           </a:p>
         </p:txBody>
@@ -5277,7 +5277,7 @@
                 </a:solidFill>
                 <a:latin typeface="Helvetica Neue"/>
               </a:rPr>
-              <a:t>119 avg views/post</a:t>
+              <a:t>123 avg views/post</a:t>
             </a:r>
           </a:p>
         </p:txBody>
@@ -5587,7 +5587,7 @@
                 </a:solidFill>
                 <a:latin typeface="Helvetica Neue"/>
               </a:rPr>
-              <a:t>49,287   (13 posts · 3,791 avg)</a:t>
+              <a:t>49,400   (13 posts · 3,800 avg)</a:t>
             </a:r>
           </a:p>
         </p:txBody>
@@ -5635,7 +5635,7 @@
         <p:spPr>
           <a:xfrm>
             <a:off x="3383280" y="2532888"/>
-            <a:ext cx="6335791" cy="192024"/>
+            <a:ext cx="6323242" cy="192024"/>
           </a:xfrm>
           <a:prstGeom prst="rect">
             <a:avLst/>
@@ -5678,7 +5678,7 @@
         </p:nvSpPr>
         <p:spPr>
           <a:xfrm>
-            <a:off x="9810511" y="2505456"/>
+            <a:off x="9797962" y="2505456"/>
             <a:ext cx="2286000" cy="329184"/>
           </a:xfrm>
           <a:prstGeom prst="rect">
@@ -5699,7 +5699,7 @@
                 </a:solidFill>
                 <a:latin typeface="Helvetica Neue"/>
               </a:rPr>
-              <a:t>45,534   (13 posts · 3,503 avg)</a:t>
+              <a:t>45,548   (13 posts · 3,504 avg)</a:t>
             </a:r>
           </a:p>
         </p:txBody>
@@ -5733,7 +5733,7 @@
                 </a:solidFill>
                 <a:latin typeface="Helvetica Neue"/>
               </a:rPr>
-              <a:t>Food</a:t>
+              <a:t>Other</a:t>
             </a:r>
           </a:p>
         </p:txBody>
@@ -5747,7 +5747,119 @@
         <p:spPr>
           <a:xfrm>
             <a:off x="3383280" y="2862072"/>
-            <a:ext cx="5056778" cy="192024"/>
+            <a:ext cx="5430591" cy="192024"/>
+          </a:xfrm>
+          <a:prstGeom prst="rect">
+            <a:avLst/>
+          </a:prstGeom>
+          <a:solidFill>
+            <a:srgbClr val="6B7082"/>
+          </a:solidFill>
+          <a:ln>
+            <a:noFill/>
+          </a:ln>
+          <a:effectLst/>
+        </p:spPr>
+        <p:style>
+          <a:lnRef idx="1">
+            <a:schemeClr val="accent1"/>
+          </a:lnRef>
+          <a:fillRef idx="3">
+            <a:schemeClr val="accent1"/>
+          </a:fillRef>
+          <a:effectRef idx="2">
+            <a:schemeClr val="accent1"/>
+          </a:effectRef>
+          <a:fontRef idx="minor">
+            <a:schemeClr val="lt1"/>
+          </a:fontRef>
+        </p:style>
+        <p:txBody>
+          <a:bodyPr rtlCol="0" anchor="ctr"/>
+          <a:lstStyle/>
+          <a:p>
+            <a:pPr algn="ctr"/>
+          </a:p>
+        </p:txBody>
+      </p:sp>
+      <p:sp>
+        <p:nvSpPr>
+          <p:cNvPr id="14" name="TextBox 13"/>
+          <p:cNvSpPr txBox="1"/>
+          <p:nvPr/>
+        </p:nvSpPr>
+        <p:spPr>
+          <a:xfrm>
+            <a:off x="8905311" y="2834640"/>
+            <a:ext cx="2286000" cy="329184"/>
+          </a:xfrm>
+          <a:prstGeom prst="rect">
+            <a:avLst/>
+          </a:prstGeom>
+          <a:noFill/>
+        </p:spPr>
+        <p:txBody>
+          <a:bodyPr wrap="square" lIns="0" rIns="0" tIns="0" bIns="0">
+            <a:spAutoFit/>
+          </a:bodyPr>
+          <a:lstStyle/>
+          <a:p>
+            <a:r>
+              <a:rPr sz="1000" b="0">
+                <a:solidFill>
+                  <a:srgbClr val="6B7082"/>
+                </a:solidFill>
+                <a:latin typeface="Helvetica Neue"/>
+              </a:rPr>
+              <a:t>39,118   (69 posts · 567 avg)</a:t>
+            </a:r>
+          </a:p>
+        </p:txBody>
+      </p:sp>
+      <p:sp>
+        <p:nvSpPr>
+          <p:cNvPr id="15" name="TextBox 14"/>
+          <p:cNvSpPr txBox="1"/>
+          <p:nvPr/>
+        </p:nvSpPr>
+        <p:spPr>
+          <a:xfrm>
+            <a:off x="731520" y="3163824"/>
+            <a:ext cx="2468880" cy="329184"/>
+          </a:xfrm>
+          <a:prstGeom prst="rect">
+            <a:avLst/>
+          </a:prstGeom>
+          <a:noFill/>
+        </p:spPr>
+        <p:txBody>
+          <a:bodyPr wrap="square" lIns="0" rIns="0" tIns="0" bIns="0">
+            <a:spAutoFit/>
+          </a:bodyPr>
+          <a:lstStyle/>
+          <a:p>
+            <a:r>
+              <a:rPr sz="1100" b="0">
+                <a:solidFill>
+                  <a:srgbClr val="141833"/>
+                </a:solidFill>
+                <a:latin typeface="Helvetica Neue"/>
+              </a:rPr>
+              <a:t>Food</a:t>
+            </a:r>
+          </a:p>
+        </p:txBody>
+      </p:sp>
+      <p:sp>
+        <p:nvSpPr>
+          <p:cNvPr id="16" name="Rectangle 15"/>
+          <p:cNvSpPr/>
+          <p:nvPr/>
+        </p:nvSpPr>
+        <p:spPr>
+          <a:xfrm>
+            <a:off x="3383280" y="3191256"/>
+            <a:ext cx="5238040" cy="192024"/>
           </a:xfrm>
           <a:prstGeom prst="rect">
             <a:avLst/>
@@ -5784,13 +5896,13 @@
       </p:sp>
       <p:sp>
         <p:nvSpPr>
-          <p:cNvPr id="14" name="TextBox 13"/>
-          <p:cNvSpPr txBox="1"/>
-          <p:nvPr/>
-        </p:nvSpPr>
-        <p:spPr>
-          <a:xfrm>
-            <a:off x="8531498" y="2834640"/>
+          <p:cNvPr id="17" name="TextBox 16"/>
+          <p:cNvSpPr txBox="1"/>
+          <p:nvPr/>
+        </p:nvSpPr>
+        <p:spPr>
+          <a:xfrm>
+            <a:off x="8712760" y="3163824"/>
             <a:ext cx="2286000" cy="329184"/>
           </a:xfrm>
           <a:prstGeom prst="rect">
@@ -5811,20 +5923,20 @@
                 </a:solidFill>
                 <a:latin typeface="Helvetica Neue"/>
               </a:rPr>
-              <a:t>36,342   (27 posts · 1,346 avg)</a:t>
-            </a:r>
-          </a:p>
-        </p:txBody>
-      </p:sp>
-      <p:sp>
-        <p:nvSpPr>
-          <p:cNvPr id="15" name="TextBox 14"/>
-          <p:cNvSpPr txBox="1"/>
-          <p:nvPr/>
-        </p:nvSpPr>
-        <p:spPr>
-          <a:xfrm>
-            <a:off x="731520" y="3163824"/>
+              <a:t>37,731   (30 posts · 1,258 avg)</a:t>
+            </a:r>
+          </a:p>
+        </p:txBody>
+      </p:sp>
+      <p:sp>
+        <p:nvSpPr>
+          <p:cNvPr id="18" name="TextBox 17"/>
+          <p:cNvSpPr txBox="1"/>
+          <p:nvPr/>
+        </p:nvSpPr>
+        <p:spPr>
+          <a:xfrm>
+            <a:off x="731520" y="3493008"/>
             <a:ext cx="2468880" cy="329184"/>
           </a:xfrm>
           <a:prstGeom prst="rect">
@@ -5845,21 +5957,693 @@
                 </a:solidFill>
                 <a:latin typeface="Helvetica Neue"/>
               </a:rPr>
-              <a:t>Other</a:t>
-            </a:r>
-          </a:p>
-        </p:txBody>
-      </p:sp>
-      <p:sp>
-        <p:nvSpPr>
-          <p:cNvPr id="16" name="Rectangle 15"/>
+              <a:t>American Pride</a:t>
+            </a:r>
+          </a:p>
+        </p:txBody>
+      </p:sp>
+      <p:sp>
+        <p:nvSpPr>
+          <p:cNvPr id="19" name="Rectangle 18"/>
           <p:cNvSpPr/>
           <p:nvPr/>
         </p:nvSpPr>
         <p:spPr>
           <a:xfrm>
-            <a:off x="3383280" y="3191256"/>
-            <a:ext cx="5000842" cy="192024"/>
+            <a:off x="3383280" y="3520440"/>
+            <a:ext cx="4485604" cy="192024"/>
+          </a:xfrm>
+          <a:prstGeom prst="rect">
+            <a:avLst/>
+          </a:prstGeom>
+          <a:solidFill>
+            <a:srgbClr val="990011"/>
+          </a:solidFill>
+          <a:ln>
+            <a:noFill/>
+          </a:ln>
+          <a:effectLst/>
+        </p:spPr>
+        <p:style>
+          <a:lnRef idx="1">
+            <a:schemeClr val="accent1"/>
+          </a:lnRef>
+          <a:fillRef idx="3">
+            <a:schemeClr val="accent1"/>
+          </a:fillRef>
+          <a:effectRef idx="2">
+            <a:schemeClr val="accent1"/>
+          </a:effectRef>
+          <a:fontRef idx="minor">
+            <a:schemeClr val="lt1"/>
+          </a:fontRef>
+        </p:style>
+        <p:txBody>
+          <a:bodyPr rtlCol="0" anchor="ctr"/>
+          <a:lstStyle/>
+          <a:p>
+            <a:pPr algn="ctr"/>
+          </a:p>
+        </p:txBody>
+      </p:sp>
+      <p:sp>
+        <p:nvSpPr>
+          <p:cNvPr id="20" name="TextBox 19"/>
+          <p:cNvSpPr txBox="1"/>
+          <p:nvPr/>
+        </p:nvSpPr>
+        <p:spPr>
+          <a:xfrm>
+            <a:off x="7960324" y="3493008"/>
+            <a:ext cx="2286000" cy="329184"/>
+          </a:xfrm>
+          <a:prstGeom prst="rect">
+            <a:avLst/>
+          </a:prstGeom>
+          <a:noFill/>
+        </p:spPr>
+        <p:txBody>
+          <a:bodyPr wrap="square" lIns="0" rIns="0" tIns="0" bIns="0">
+            <a:spAutoFit/>
+          </a:bodyPr>
+          <a:lstStyle/>
+          <a:p>
+            <a:r>
+              <a:rPr sz="1000" b="0">
+                <a:solidFill>
+                  <a:srgbClr val="6B7082"/>
+                </a:solidFill>
+                <a:latin typeface="Helvetica Neue"/>
+              </a:rPr>
+              <a:t>32,311   (8 posts · 4,039 avg)</a:t>
+            </a:r>
+          </a:p>
+        </p:txBody>
+      </p:sp>
+      <p:sp>
+        <p:nvSpPr>
+          <p:cNvPr id="21" name="TextBox 20"/>
+          <p:cNvSpPr txBox="1"/>
+          <p:nvPr/>
+        </p:nvSpPr>
+        <p:spPr>
+          <a:xfrm>
+            <a:off x="731520" y="3822192"/>
+            <a:ext cx="2468880" cy="329184"/>
+          </a:xfrm>
+          <a:prstGeom prst="rect">
+            <a:avLst/>
+          </a:prstGeom>
+          <a:noFill/>
+        </p:spPr>
+        <p:txBody>
+          <a:bodyPr wrap="square" lIns="0" rIns="0" tIns="0" bIns="0">
+            <a:spAutoFit/>
+          </a:bodyPr>
+          <a:lstStyle/>
+          <a:p>
+            <a:r>
+              <a:rPr sz="1100" b="0">
+                <a:solidFill>
+                  <a:srgbClr val="141833"/>
+                </a:solidFill>
+                <a:latin typeface="Helvetica Neue"/>
+              </a:rPr>
+              <a:t>Trujillo Scandal</a:t>
+            </a:r>
+          </a:p>
+        </p:txBody>
+      </p:sp>
+      <p:sp>
+        <p:nvSpPr>
+          <p:cNvPr id="22" name="Rectangle 21"/>
+          <p:cNvSpPr/>
+          <p:nvPr/>
+        </p:nvSpPr>
+        <p:spPr>
+          <a:xfrm>
+            <a:off x="3383280" y="3849624"/>
+            <a:ext cx="4291664" cy="192024"/>
+          </a:xfrm>
+          <a:prstGeom prst="rect">
+            <a:avLst/>
+          </a:prstGeom>
+          <a:solidFill>
+            <a:srgbClr val="990011"/>
+          </a:solidFill>
+          <a:ln>
+            <a:noFill/>
+          </a:ln>
+          <a:effectLst/>
+        </p:spPr>
+        <p:style>
+          <a:lnRef idx="1">
+            <a:schemeClr val="accent1"/>
+          </a:lnRef>
+          <a:fillRef idx="3">
+            <a:schemeClr val="accent1"/>
+          </a:fillRef>
+          <a:effectRef idx="2">
+            <a:schemeClr val="accent1"/>
+          </a:effectRef>
+          <a:fontRef idx="minor">
+            <a:schemeClr val="lt1"/>
+          </a:fontRef>
+        </p:style>
+        <p:txBody>
+          <a:bodyPr rtlCol="0" anchor="ctr"/>
+          <a:lstStyle/>
+          <a:p>
+            <a:pPr algn="ctr"/>
+          </a:p>
+        </p:txBody>
+      </p:sp>
+      <p:sp>
+        <p:nvSpPr>
+          <p:cNvPr id="23" name="TextBox 22"/>
+          <p:cNvSpPr txBox="1"/>
+          <p:nvPr/>
+        </p:nvSpPr>
+        <p:spPr>
+          <a:xfrm>
+            <a:off x="7766384" y="3822192"/>
+            <a:ext cx="2286000" cy="329184"/>
+          </a:xfrm>
+          <a:prstGeom prst="rect">
+            <a:avLst/>
+          </a:prstGeom>
+          <a:noFill/>
+        </p:spPr>
+        <p:txBody>
+          <a:bodyPr wrap="square" lIns="0" rIns="0" tIns="0" bIns="0">
+            <a:spAutoFit/>
+          </a:bodyPr>
+          <a:lstStyle/>
+          <a:p>
+            <a:r>
+              <a:rPr sz="1000" b="0">
+                <a:solidFill>
+                  <a:srgbClr val="6B7082"/>
+                </a:solidFill>
+                <a:latin typeface="Helvetica Neue"/>
+              </a:rPr>
+              <a:t>30,914   (12 posts · 2,576 avg)</a:t>
+            </a:r>
+          </a:p>
+        </p:txBody>
+      </p:sp>
+      <p:sp>
+        <p:nvSpPr>
+          <p:cNvPr id="24" name="TextBox 23"/>
+          <p:cNvSpPr txBox="1"/>
+          <p:nvPr/>
+        </p:nvSpPr>
+        <p:spPr>
+          <a:xfrm>
+            <a:off x="731520" y="4151376"/>
+            <a:ext cx="2468880" cy="329184"/>
+          </a:xfrm>
+          <a:prstGeom prst="rect">
+            <a:avLst/>
+          </a:prstGeom>
+          <a:noFill/>
+        </p:spPr>
+        <p:txBody>
+          <a:bodyPr wrap="square" lIns="0" rIns="0" tIns="0" bIns="0">
+            <a:spAutoFit/>
+          </a:bodyPr>
+          <a:lstStyle/>
+          <a:p>
+            <a:r>
+              <a:rPr sz="1100" b="0">
+                <a:solidFill>
+                  <a:srgbClr val="141833"/>
+                </a:solidFill>
+                <a:latin typeface="Helvetica Neue"/>
+              </a:rPr>
+              <a:t>Council Chaos</a:t>
+            </a:r>
+          </a:p>
+        </p:txBody>
+      </p:sp>
+      <p:sp>
+        <p:nvSpPr>
+          <p:cNvPr id="25" name="Rectangle 24"/>
+          <p:cNvSpPr/>
+          <p:nvPr/>
+        </p:nvSpPr>
+        <p:spPr>
+          <a:xfrm>
+            <a:off x="3383280" y="4178807"/>
+            <a:ext cx="2905348" cy="192024"/>
+          </a:xfrm>
+          <a:prstGeom prst="rect">
+            <a:avLst/>
+          </a:prstGeom>
+          <a:solidFill>
+            <a:srgbClr val="990011"/>
+          </a:solidFill>
+          <a:ln>
+            <a:noFill/>
+          </a:ln>
+          <a:effectLst/>
+        </p:spPr>
+        <p:style>
+          <a:lnRef idx="1">
+            <a:schemeClr val="accent1"/>
+          </a:lnRef>
+          <a:fillRef idx="3">
+            <a:schemeClr val="accent1"/>
+          </a:fillRef>
+          <a:effectRef idx="2">
+            <a:schemeClr val="accent1"/>
+          </a:effectRef>
+          <a:fontRef idx="minor">
+            <a:schemeClr val="lt1"/>
+          </a:fontRef>
+        </p:style>
+        <p:txBody>
+          <a:bodyPr rtlCol="0" anchor="ctr"/>
+          <a:lstStyle/>
+          <a:p>
+            <a:pPr algn="ctr"/>
+          </a:p>
+        </p:txBody>
+      </p:sp>
+      <p:sp>
+        <p:nvSpPr>
+          <p:cNvPr id="26" name="TextBox 25"/>
+          <p:cNvSpPr txBox="1"/>
+          <p:nvPr/>
+        </p:nvSpPr>
+        <p:spPr>
+          <a:xfrm>
+            <a:off x="6380068" y="4151376"/>
+            <a:ext cx="2286000" cy="329184"/>
+          </a:xfrm>
+          <a:prstGeom prst="rect">
+            <a:avLst/>
+          </a:prstGeom>
+          <a:noFill/>
+        </p:spPr>
+        <p:txBody>
+          <a:bodyPr wrap="square" lIns="0" rIns="0" tIns="0" bIns="0">
+            <a:spAutoFit/>
+          </a:bodyPr>
+          <a:lstStyle/>
+          <a:p>
+            <a:r>
+              <a:rPr sz="1000" b="0">
+                <a:solidFill>
+                  <a:srgbClr val="6B7082"/>
+                </a:solidFill>
+                <a:latin typeface="Helvetica Neue"/>
+              </a:rPr>
+              <a:t>20,928   (5 posts · 4,186 avg)</a:t>
+            </a:r>
+          </a:p>
+        </p:txBody>
+      </p:sp>
+      <p:sp>
+        <p:nvSpPr>
+          <p:cNvPr id="27" name="TextBox 26"/>
+          <p:cNvSpPr txBox="1"/>
+          <p:nvPr/>
+        </p:nvSpPr>
+        <p:spPr>
+          <a:xfrm>
+            <a:off x="731520" y="4480560"/>
+            <a:ext cx="2468880" cy="329184"/>
+          </a:xfrm>
+          <a:prstGeom prst="rect">
+            <a:avLst/>
+          </a:prstGeom>
+          <a:noFill/>
+        </p:spPr>
+        <p:txBody>
+          <a:bodyPr wrap="square" lIns="0" rIns="0" tIns="0" bIns="0">
+            <a:spAutoFit/>
+          </a:bodyPr>
+          <a:lstStyle/>
+          <a:p>
+            <a:r>
+              <a:rPr sz="1100" b="0">
+                <a:solidFill>
+                  <a:srgbClr val="141833"/>
+                </a:solidFill>
+                <a:latin typeface="Helvetica Neue"/>
+              </a:rPr>
+              <a:t>Community Local</a:t>
+            </a:r>
+          </a:p>
+        </p:txBody>
+      </p:sp>
+      <p:sp>
+        <p:nvSpPr>
+          <p:cNvPr id="28" name="Rectangle 27"/>
+          <p:cNvSpPr/>
+          <p:nvPr/>
+        </p:nvSpPr>
+        <p:spPr>
+          <a:xfrm>
+            <a:off x="3383280" y="4507992"/>
+            <a:ext cx="2676563" cy="192024"/>
+          </a:xfrm>
+          <a:prstGeom prst="rect">
+            <a:avLst/>
+          </a:prstGeom>
+          <a:solidFill>
+            <a:srgbClr val="141833"/>
+          </a:solidFill>
+          <a:ln>
+            <a:noFill/>
+          </a:ln>
+          <a:effectLst/>
+        </p:spPr>
+        <p:style>
+          <a:lnRef idx="1">
+            <a:schemeClr val="accent1"/>
+          </a:lnRef>
+          <a:fillRef idx="3">
+            <a:schemeClr val="accent1"/>
+          </a:fillRef>
+          <a:effectRef idx="2">
+            <a:schemeClr val="accent1"/>
+          </a:effectRef>
+          <a:fontRef idx="minor">
+            <a:schemeClr val="lt1"/>
+          </a:fontRef>
+        </p:style>
+        <p:txBody>
+          <a:bodyPr rtlCol="0" anchor="ctr"/>
+          <a:lstStyle/>
+          <a:p>
+            <a:pPr algn="ctr"/>
+          </a:p>
+        </p:txBody>
+      </p:sp>
+      <p:sp>
+        <p:nvSpPr>
+          <p:cNvPr id="29" name="TextBox 28"/>
+          <p:cNvSpPr txBox="1"/>
+          <p:nvPr/>
+        </p:nvSpPr>
+        <p:spPr>
+          <a:xfrm>
+            <a:off x="6151283" y="4480560"/>
+            <a:ext cx="2286000" cy="329184"/>
+          </a:xfrm>
+          <a:prstGeom prst="rect">
+            <a:avLst/>
+          </a:prstGeom>
+          <a:noFill/>
+        </p:spPr>
+        <p:txBody>
+          <a:bodyPr wrap="square" lIns="0" rIns="0" tIns="0" bIns="0">
+            <a:spAutoFit/>
+          </a:bodyPr>
+          <a:lstStyle/>
+          <a:p>
+            <a:r>
+              <a:rPr sz="1000" b="0">
+                <a:solidFill>
+                  <a:srgbClr val="6B7082"/>
+                </a:solidFill>
+                <a:latin typeface="Helvetica Neue"/>
+              </a:rPr>
+              <a:t>19,280   (21 posts · 918 avg)</a:t>
+            </a:r>
+          </a:p>
+        </p:txBody>
+      </p:sp>
+      <p:sp>
+        <p:nvSpPr>
+          <p:cNvPr id="30" name="TextBox 29"/>
+          <p:cNvSpPr txBox="1"/>
+          <p:nvPr/>
+        </p:nvSpPr>
+        <p:spPr>
+          <a:xfrm>
+            <a:off x="731520" y="4809744"/>
+            <a:ext cx="2468880" cy="329184"/>
+          </a:xfrm>
+          <a:prstGeom prst="rect">
+            <a:avLst/>
+          </a:prstGeom>
+          <a:noFill/>
+        </p:spPr>
+        <p:txBody>
+          <a:bodyPr wrap="square" lIns="0" rIns="0" tIns="0" bIns="0">
+            <a:spAutoFit/>
+          </a:bodyPr>
+          <a:lstStyle/>
+          <a:p>
+            <a:r>
+              <a:rPr sz="1100" b="0">
+                <a:solidFill>
+                  <a:srgbClr val="141833"/>
+                </a:solidFill>
+                <a:latin typeface="Helvetica Neue"/>
+              </a:rPr>
+              <a:t>Politics (other)</a:t>
+            </a:r>
+          </a:p>
+        </p:txBody>
+      </p:sp>
+      <p:sp>
+        <p:nvSpPr>
+          <p:cNvPr id="31" name="Rectangle 30"/>
+          <p:cNvSpPr/>
+          <p:nvPr/>
+        </p:nvSpPr>
+        <p:spPr>
+          <a:xfrm>
+            <a:off x="3383280" y="4837176"/>
+            <a:ext cx="2074197" cy="192024"/>
+          </a:xfrm>
+          <a:prstGeom prst="rect">
+            <a:avLst/>
+          </a:prstGeom>
+          <a:solidFill>
+            <a:srgbClr val="2F3C7E"/>
+          </a:solidFill>
+          <a:ln>
+            <a:noFill/>
+          </a:ln>
+          <a:effectLst/>
+        </p:spPr>
+        <p:style>
+          <a:lnRef idx="1">
+            <a:schemeClr val="accent1"/>
+          </a:lnRef>
+          <a:fillRef idx="3">
+            <a:schemeClr val="accent1"/>
+          </a:fillRef>
+          <a:effectRef idx="2">
+            <a:schemeClr val="accent1"/>
+          </a:effectRef>
+          <a:fontRef idx="minor">
+            <a:schemeClr val="lt1"/>
+          </a:fontRef>
+        </p:style>
+        <p:txBody>
+          <a:bodyPr rtlCol="0" anchor="ctr"/>
+          <a:lstStyle/>
+          <a:p>
+            <a:pPr algn="ctr"/>
+          </a:p>
+        </p:txBody>
+      </p:sp>
+      <p:sp>
+        <p:nvSpPr>
+          <p:cNvPr id="32" name="TextBox 31"/>
+          <p:cNvSpPr txBox="1"/>
+          <p:nvPr/>
+        </p:nvSpPr>
+        <p:spPr>
+          <a:xfrm>
+            <a:off x="5548917" y="4809744"/>
+            <a:ext cx="2286000" cy="329184"/>
+          </a:xfrm>
+          <a:prstGeom prst="rect">
+            <a:avLst/>
+          </a:prstGeom>
+          <a:noFill/>
+        </p:spPr>
+        <p:txBody>
+          <a:bodyPr wrap="square" lIns="0" rIns="0" tIns="0" bIns="0">
+            <a:spAutoFit/>
+          </a:bodyPr>
+          <a:lstStyle/>
+          <a:p>
+            <a:r>
+              <a:rPr sz="1000" b="0">
+                <a:solidFill>
+                  <a:srgbClr val="6B7082"/>
+                </a:solidFill>
+                <a:latin typeface="Helvetica Neue"/>
+              </a:rPr>
+              <a:t>14,941   (12 posts · 1,245 avg)</a:t>
+            </a:r>
+          </a:p>
+        </p:txBody>
+      </p:sp>
+      <p:sp>
+        <p:nvSpPr>
+          <p:cNvPr id="33" name="TextBox 32"/>
+          <p:cNvSpPr txBox="1"/>
+          <p:nvPr/>
+        </p:nvSpPr>
+        <p:spPr>
+          <a:xfrm>
+            <a:off x="731520" y="5138928"/>
+            <a:ext cx="2468880" cy="329184"/>
+          </a:xfrm>
+          <a:prstGeom prst="rect">
+            <a:avLst/>
+          </a:prstGeom>
+          <a:noFill/>
+        </p:spPr>
+        <p:txBody>
+          <a:bodyPr wrap="square" lIns="0" rIns="0" tIns="0" bIns="0">
+            <a:spAutoFit/>
+          </a:bodyPr>
+          <a:lstStyle/>
+          <a:p>
+            <a:r>
+              <a:rPr sz="1100" b="0">
+                <a:solidFill>
+                  <a:srgbClr val="141833"/>
+                </a:solidFill>
+                <a:latin typeface="Helvetica Neue"/>
+              </a:rPr>
+              <a:t>AI Fake News</a:t>
+            </a:r>
+          </a:p>
+        </p:txBody>
+      </p:sp>
+      <p:sp>
+        <p:nvSpPr>
+          <p:cNvPr id="34" name="Rectangle 33"/>
+          <p:cNvSpPr/>
+          <p:nvPr/>
+        </p:nvSpPr>
+        <p:spPr>
+          <a:xfrm>
+            <a:off x="3383280" y="5166359"/>
+            <a:ext cx="1793908" cy="192024"/>
+          </a:xfrm>
+          <a:prstGeom prst="rect">
+            <a:avLst/>
+          </a:prstGeom>
+          <a:solidFill>
+            <a:srgbClr val="990011"/>
+          </a:solidFill>
+          <a:ln>
+            <a:noFill/>
+          </a:ln>
+          <a:effectLst/>
+        </p:spPr>
+        <p:style>
+          <a:lnRef idx="1">
+            <a:schemeClr val="accent1"/>
+          </a:lnRef>
+          <a:fillRef idx="3">
+            <a:schemeClr val="accent1"/>
+          </a:fillRef>
+          <a:effectRef idx="2">
+            <a:schemeClr val="accent1"/>
+          </a:effectRef>
+          <a:fontRef idx="minor">
+            <a:schemeClr val="lt1"/>
+          </a:fontRef>
+        </p:style>
+        <p:txBody>
+          <a:bodyPr rtlCol="0" anchor="ctr"/>
+          <a:lstStyle/>
+          <a:p>
+            <a:pPr algn="ctr"/>
+          </a:p>
+        </p:txBody>
+      </p:sp>
+      <p:sp>
+        <p:nvSpPr>
+          <p:cNvPr id="35" name="TextBox 34"/>
+          <p:cNvSpPr txBox="1"/>
+          <p:nvPr/>
+        </p:nvSpPr>
+        <p:spPr>
+          <a:xfrm>
+            <a:off x="5268628" y="5138928"/>
+            <a:ext cx="2286000" cy="329184"/>
+          </a:xfrm>
+          <a:prstGeom prst="rect">
+            <a:avLst/>
+          </a:prstGeom>
+          <a:noFill/>
+        </p:spPr>
+        <p:txBody>
+          <a:bodyPr wrap="square" lIns="0" rIns="0" tIns="0" bIns="0">
+            <a:spAutoFit/>
+          </a:bodyPr>
+          <a:lstStyle/>
+          <a:p>
+            <a:r>
+              <a:rPr sz="1000" b="0">
+                <a:solidFill>
+                  <a:srgbClr val="6B7082"/>
+                </a:solidFill>
+                <a:latin typeface="Helvetica Neue"/>
+              </a:rPr>
+              <a:t>12,922   (7 posts · 1,846 avg)</a:t>
+            </a:r>
+          </a:p>
+        </p:txBody>
+      </p:sp>
+      <p:sp>
+        <p:nvSpPr>
+          <p:cNvPr id="36" name="TextBox 35"/>
+          <p:cNvSpPr txBox="1"/>
+          <p:nvPr/>
+        </p:nvSpPr>
+        <p:spPr>
+          <a:xfrm>
+            <a:off x="731520" y="5468112"/>
+            <a:ext cx="2468880" cy="329184"/>
+          </a:xfrm>
+          <a:prstGeom prst="rect">
+            <a:avLst/>
+          </a:prstGeom>
+          <a:noFill/>
+        </p:spPr>
+        <p:txBody>
+          <a:bodyPr wrap="square" lIns="0" rIns="0" tIns="0" bIns="0">
+            <a:spAutoFit/>
+          </a:bodyPr>
+          <a:lstStyle/>
+          <a:p>
+            <a:r>
+              <a:rPr sz="1100" b="0">
+                <a:solidFill>
+                  <a:srgbClr val="141833"/>
+                </a:solidFill>
+                <a:latin typeface="Helvetica Neue"/>
+              </a:rPr>
+              <a:t>FIFA — Critique</a:t>
+            </a:r>
+          </a:p>
+        </p:txBody>
+      </p:sp>
+      <p:sp>
+        <p:nvSpPr>
+          <p:cNvPr id="37" name="Rectangle 36"/>
+          <p:cNvSpPr/>
+          <p:nvPr/>
+        </p:nvSpPr>
+        <p:spPr>
+          <a:xfrm>
+            <a:off x="3383280" y="5495543"/>
+            <a:ext cx="1739072" cy="192024"/>
           </a:xfrm>
           <a:prstGeom prst="rect">
             <a:avLst/>
@@ -5896,13 +6680,13 @@
       </p:sp>
       <p:sp>
         <p:nvSpPr>
-          <p:cNvPr id="17" name="TextBox 16"/>
-          <p:cNvSpPr txBox="1"/>
-          <p:nvPr/>
-        </p:nvSpPr>
-        <p:spPr>
-          <a:xfrm>
-            <a:off x="8475562" y="3163824"/>
+          <p:cNvPr id="38" name="TextBox 37"/>
+          <p:cNvSpPr txBox="1"/>
+          <p:nvPr/>
+        </p:nvSpPr>
+        <p:spPr>
+          <a:xfrm>
+            <a:off x="5213792" y="5468112"/>
             <a:ext cx="2286000" cy="329184"/>
           </a:xfrm>
           <a:prstGeom prst="rect">
@@ -5923,20 +6707,20 @@
                 </a:solidFill>
                 <a:latin typeface="Helvetica Neue"/>
               </a:rPr>
-              <a:t>35,940   (65 posts · 553 avg)</a:t>
-            </a:r>
-          </a:p>
-        </p:txBody>
-      </p:sp>
-      <p:sp>
-        <p:nvSpPr>
-          <p:cNvPr id="18" name="TextBox 17"/>
-          <p:cNvSpPr txBox="1"/>
-          <p:nvPr/>
-        </p:nvSpPr>
-        <p:spPr>
-          <a:xfrm>
-            <a:off x="731520" y="3493008"/>
+              <a:t>12,527   (10 posts · 1,253 avg)</a:t>
+            </a:r>
+          </a:p>
+        </p:txBody>
+      </p:sp>
+      <p:sp>
+        <p:nvSpPr>
+          <p:cNvPr id="39" name="TextBox 38"/>
+          <p:cNvSpPr txBox="1"/>
+          <p:nvPr/>
+        </p:nvSpPr>
+        <p:spPr>
+          <a:xfrm>
+            <a:off x="731520" y="5797296"/>
             <a:ext cx="2468880" cy="329184"/>
           </a:xfrm>
           <a:prstGeom prst="rect">
@@ -5957,693 +6741,21 @@
                 </a:solidFill>
                 <a:latin typeface="Helvetica Neue"/>
               </a:rPr>
-              <a:t>Trujillo Scandal</a:t>
-            </a:r>
-          </a:p>
-        </p:txBody>
-      </p:sp>
-      <p:sp>
-        <p:nvSpPr>
-          <p:cNvPr id="19" name="Rectangle 18"/>
+              <a:t>Resident Highlight</a:t>
+            </a:r>
+          </a:p>
+        </p:txBody>
+      </p:sp>
+      <p:sp>
+        <p:nvSpPr>
+          <p:cNvPr id="40" name="Rectangle 39"/>
           <p:cNvSpPr/>
           <p:nvPr/>
         </p:nvSpPr>
         <p:spPr>
           <a:xfrm>
-            <a:off x="3383280" y="3520440"/>
-            <a:ext cx="4301503" cy="192024"/>
-          </a:xfrm>
-          <a:prstGeom prst="rect">
-            <a:avLst/>
-          </a:prstGeom>
-          <a:solidFill>
-            <a:srgbClr val="990011"/>
-          </a:solidFill>
-          <a:ln>
-            <a:noFill/>
-          </a:ln>
-          <a:effectLst/>
-        </p:spPr>
-        <p:style>
-          <a:lnRef idx="1">
-            <a:schemeClr val="accent1"/>
-          </a:lnRef>
-          <a:fillRef idx="3">
-            <a:schemeClr val="accent1"/>
-          </a:fillRef>
-          <a:effectRef idx="2">
-            <a:schemeClr val="accent1"/>
-          </a:effectRef>
-          <a:fontRef idx="minor">
-            <a:schemeClr val="lt1"/>
-          </a:fontRef>
-        </p:style>
-        <p:txBody>
-          <a:bodyPr rtlCol="0" anchor="ctr"/>
-          <a:lstStyle/>
-          <a:p>
-            <a:pPr algn="ctr"/>
-          </a:p>
-        </p:txBody>
-      </p:sp>
-      <p:sp>
-        <p:nvSpPr>
-          <p:cNvPr id="20" name="TextBox 19"/>
-          <p:cNvSpPr txBox="1"/>
-          <p:nvPr/>
-        </p:nvSpPr>
-        <p:spPr>
-          <a:xfrm>
-            <a:off x="7776223" y="3493008"/>
-            <a:ext cx="2286000" cy="329184"/>
-          </a:xfrm>
-          <a:prstGeom prst="rect">
-            <a:avLst/>
-          </a:prstGeom>
-          <a:noFill/>
-        </p:spPr>
-        <p:txBody>
-          <a:bodyPr wrap="square" lIns="0" rIns="0" tIns="0" bIns="0">
-            <a:spAutoFit/>
-          </a:bodyPr>
-          <a:lstStyle/>
-          <a:p>
-            <a:r>
-              <a:rPr sz="1000" b="0">
-                <a:solidFill>
-                  <a:srgbClr val="6B7082"/>
-                </a:solidFill>
-                <a:latin typeface="Helvetica Neue"/>
-              </a:rPr>
-              <a:t>30,914   (12 posts · 2,576 avg)</a:t>
-            </a:r>
-          </a:p>
-        </p:txBody>
-      </p:sp>
-      <p:sp>
-        <p:nvSpPr>
-          <p:cNvPr id="21" name="TextBox 20"/>
-          <p:cNvSpPr txBox="1"/>
-          <p:nvPr/>
-        </p:nvSpPr>
-        <p:spPr>
-          <a:xfrm>
-            <a:off x="731520" y="3822192"/>
-            <a:ext cx="2468880" cy="329184"/>
-          </a:xfrm>
-          <a:prstGeom prst="rect">
-            <a:avLst/>
-          </a:prstGeom>
-          <a:noFill/>
-        </p:spPr>
-        <p:txBody>
-          <a:bodyPr wrap="square" lIns="0" rIns="0" tIns="0" bIns="0">
-            <a:spAutoFit/>
-          </a:bodyPr>
-          <a:lstStyle/>
-          <a:p>
-            <a:r>
-              <a:rPr sz="1100" b="0">
-                <a:solidFill>
-                  <a:srgbClr val="141833"/>
-                </a:solidFill>
-                <a:latin typeface="Helvetica Neue"/>
-              </a:rPr>
-              <a:t>Council Chaos</a:t>
-            </a:r>
-          </a:p>
-        </p:txBody>
-      </p:sp>
-      <p:sp>
-        <p:nvSpPr>
-          <p:cNvPr id="22" name="Rectangle 21"/>
-          <p:cNvSpPr/>
-          <p:nvPr/>
-        </p:nvSpPr>
-        <p:spPr>
-          <a:xfrm>
-            <a:off x="3383280" y="3849624"/>
-            <a:ext cx="2912009" cy="192024"/>
-          </a:xfrm>
-          <a:prstGeom prst="rect">
-            <a:avLst/>
-          </a:prstGeom>
-          <a:solidFill>
-            <a:srgbClr val="990011"/>
-          </a:solidFill>
-          <a:ln>
-            <a:noFill/>
-          </a:ln>
-          <a:effectLst/>
-        </p:spPr>
-        <p:style>
-          <a:lnRef idx="1">
-            <a:schemeClr val="accent1"/>
-          </a:lnRef>
-          <a:fillRef idx="3">
-            <a:schemeClr val="accent1"/>
-          </a:fillRef>
-          <a:effectRef idx="2">
-            <a:schemeClr val="accent1"/>
-          </a:effectRef>
-          <a:fontRef idx="minor">
-            <a:schemeClr val="lt1"/>
-          </a:fontRef>
-        </p:style>
-        <p:txBody>
-          <a:bodyPr rtlCol="0" anchor="ctr"/>
-          <a:lstStyle/>
-          <a:p>
-            <a:pPr algn="ctr"/>
-          </a:p>
-        </p:txBody>
-      </p:sp>
-      <p:sp>
-        <p:nvSpPr>
-          <p:cNvPr id="23" name="TextBox 22"/>
-          <p:cNvSpPr txBox="1"/>
-          <p:nvPr/>
-        </p:nvSpPr>
-        <p:spPr>
-          <a:xfrm>
-            <a:off x="6386729" y="3822192"/>
-            <a:ext cx="2286000" cy="329184"/>
-          </a:xfrm>
-          <a:prstGeom prst="rect">
-            <a:avLst/>
-          </a:prstGeom>
-          <a:noFill/>
-        </p:spPr>
-        <p:txBody>
-          <a:bodyPr wrap="square" lIns="0" rIns="0" tIns="0" bIns="0">
-            <a:spAutoFit/>
-          </a:bodyPr>
-          <a:lstStyle/>
-          <a:p>
-            <a:r>
-              <a:rPr sz="1000" b="0">
-                <a:solidFill>
-                  <a:srgbClr val="6B7082"/>
-                </a:solidFill>
-                <a:latin typeface="Helvetica Neue"/>
-              </a:rPr>
-              <a:t>20,928   (5 posts · 4,186 avg)</a:t>
-            </a:r>
-          </a:p>
-        </p:txBody>
-      </p:sp>
-      <p:sp>
-        <p:nvSpPr>
-          <p:cNvPr id="24" name="TextBox 23"/>
-          <p:cNvSpPr txBox="1"/>
-          <p:nvPr/>
-        </p:nvSpPr>
-        <p:spPr>
-          <a:xfrm>
-            <a:off x="731520" y="4151376"/>
-            <a:ext cx="2468880" cy="329184"/>
-          </a:xfrm>
-          <a:prstGeom prst="rect">
-            <a:avLst/>
-          </a:prstGeom>
-          <a:noFill/>
-        </p:spPr>
-        <p:txBody>
-          <a:bodyPr wrap="square" lIns="0" rIns="0" tIns="0" bIns="0">
-            <a:spAutoFit/>
-          </a:bodyPr>
-          <a:lstStyle/>
-          <a:p>
-            <a:r>
-              <a:rPr sz="1100" b="0">
-                <a:solidFill>
-                  <a:srgbClr val="141833"/>
-                </a:solidFill>
-                <a:latin typeface="Helvetica Neue"/>
-              </a:rPr>
-              <a:t>Community Local</a:t>
-            </a:r>
-          </a:p>
-        </p:txBody>
-      </p:sp>
-      <p:sp>
-        <p:nvSpPr>
-          <p:cNvPr id="25" name="Rectangle 24"/>
-          <p:cNvSpPr/>
-          <p:nvPr/>
-        </p:nvSpPr>
-        <p:spPr>
-          <a:xfrm>
-            <a:off x="3383280" y="4178807"/>
-            <a:ext cx="2562757" cy="192024"/>
-          </a:xfrm>
-          <a:prstGeom prst="rect">
-            <a:avLst/>
-          </a:prstGeom>
-          <a:solidFill>
-            <a:srgbClr val="141833"/>
-          </a:solidFill>
-          <a:ln>
-            <a:noFill/>
-          </a:ln>
-          <a:effectLst/>
-        </p:spPr>
-        <p:style>
-          <a:lnRef idx="1">
-            <a:schemeClr val="accent1"/>
-          </a:lnRef>
-          <a:fillRef idx="3">
-            <a:schemeClr val="accent1"/>
-          </a:fillRef>
-          <a:effectRef idx="2">
-            <a:schemeClr val="accent1"/>
-          </a:effectRef>
-          <a:fontRef idx="minor">
-            <a:schemeClr val="lt1"/>
-          </a:fontRef>
-        </p:style>
-        <p:txBody>
-          <a:bodyPr rtlCol="0" anchor="ctr"/>
-          <a:lstStyle/>
-          <a:p>
-            <a:pPr algn="ctr"/>
-          </a:p>
-        </p:txBody>
-      </p:sp>
-      <p:sp>
-        <p:nvSpPr>
-          <p:cNvPr id="26" name="TextBox 25"/>
-          <p:cNvSpPr txBox="1"/>
-          <p:nvPr/>
-        </p:nvSpPr>
-        <p:spPr>
-          <a:xfrm>
-            <a:off x="6037477" y="4151376"/>
-            <a:ext cx="2286000" cy="329184"/>
-          </a:xfrm>
-          <a:prstGeom prst="rect">
-            <a:avLst/>
-          </a:prstGeom>
-          <a:noFill/>
-        </p:spPr>
-        <p:txBody>
-          <a:bodyPr wrap="square" lIns="0" rIns="0" tIns="0" bIns="0">
-            <a:spAutoFit/>
-          </a:bodyPr>
-          <a:lstStyle/>
-          <a:p>
-            <a:r>
-              <a:rPr sz="1000" b="0">
-                <a:solidFill>
-                  <a:srgbClr val="6B7082"/>
-                </a:solidFill>
-                <a:latin typeface="Helvetica Neue"/>
-              </a:rPr>
-              <a:t>18,418   (20 posts · 921 avg)</a:t>
-            </a:r>
-          </a:p>
-        </p:txBody>
-      </p:sp>
-      <p:sp>
-        <p:nvSpPr>
-          <p:cNvPr id="27" name="TextBox 26"/>
-          <p:cNvSpPr txBox="1"/>
-          <p:nvPr/>
-        </p:nvSpPr>
-        <p:spPr>
-          <a:xfrm>
-            <a:off x="731520" y="4480560"/>
-            <a:ext cx="2468880" cy="329184"/>
-          </a:xfrm>
-          <a:prstGeom prst="rect">
-            <a:avLst/>
-          </a:prstGeom>
-          <a:noFill/>
-        </p:spPr>
-        <p:txBody>
-          <a:bodyPr wrap="square" lIns="0" rIns="0" tIns="0" bIns="0">
-            <a:spAutoFit/>
-          </a:bodyPr>
-          <a:lstStyle/>
-          <a:p>
-            <a:r>
-              <a:rPr sz="1100" b="0">
-                <a:solidFill>
-                  <a:srgbClr val="141833"/>
-                </a:solidFill>
-                <a:latin typeface="Helvetica Neue"/>
-              </a:rPr>
-              <a:t>Politics (other)</a:t>
-            </a:r>
-          </a:p>
-        </p:txBody>
-      </p:sp>
-      <p:sp>
-        <p:nvSpPr>
-          <p:cNvPr id="28" name="Rectangle 27"/>
-          <p:cNvSpPr/>
-          <p:nvPr/>
-        </p:nvSpPr>
-        <p:spPr>
-          <a:xfrm>
-            <a:off x="3383280" y="4507992"/>
-            <a:ext cx="2078953" cy="192024"/>
-          </a:xfrm>
-          <a:prstGeom prst="rect">
-            <a:avLst/>
-          </a:prstGeom>
-          <a:solidFill>
-            <a:srgbClr val="2F3C7E"/>
-          </a:solidFill>
-          <a:ln>
-            <a:noFill/>
-          </a:ln>
-          <a:effectLst/>
-        </p:spPr>
-        <p:style>
-          <a:lnRef idx="1">
-            <a:schemeClr val="accent1"/>
-          </a:lnRef>
-          <a:fillRef idx="3">
-            <a:schemeClr val="accent1"/>
-          </a:fillRef>
-          <a:effectRef idx="2">
-            <a:schemeClr val="accent1"/>
-          </a:effectRef>
-          <a:fontRef idx="minor">
-            <a:schemeClr val="lt1"/>
-          </a:fontRef>
-        </p:style>
-        <p:txBody>
-          <a:bodyPr rtlCol="0" anchor="ctr"/>
-          <a:lstStyle/>
-          <a:p>
-            <a:pPr algn="ctr"/>
-          </a:p>
-        </p:txBody>
-      </p:sp>
-      <p:sp>
-        <p:nvSpPr>
-          <p:cNvPr id="29" name="TextBox 28"/>
-          <p:cNvSpPr txBox="1"/>
-          <p:nvPr/>
-        </p:nvSpPr>
-        <p:spPr>
-          <a:xfrm>
-            <a:off x="5553673" y="4480560"/>
-            <a:ext cx="2286000" cy="329184"/>
-          </a:xfrm>
-          <a:prstGeom prst="rect">
-            <a:avLst/>
-          </a:prstGeom>
-          <a:noFill/>
-        </p:spPr>
-        <p:txBody>
-          <a:bodyPr wrap="square" lIns="0" rIns="0" tIns="0" bIns="0">
-            <a:spAutoFit/>
-          </a:bodyPr>
-          <a:lstStyle/>
-          <a:p>
-            <a:r>
-              <a:rPr sz="1000" b="0">
-                <a:solidFill>
-                  <a:srgbClr val="6B7082"/>
-                </a:solidFill>
-                <a:latin typeface="Helvetica Neue"/>
-              </a:rPr>
-              <a:t>14,941   (12 posts · 1,245 avg)</a:t>
-            </a:r>
-          </a:p>
-        </p:txBody>
-      </p:sp>
-      <p:sp>
-        <p:nvSpPr>
-          <p:cNvPr id="30" name="TextBox 29"/>
-          <p:cNvSpPr txBox="1"/>
-          <p:nvPr/>
-        </p:nvSpPr>
-        <p:spPr>
-          <a:xfrm>
-            <a:off x="731520" y="4809744"/>
-            <a:ext cx="2468880" cy="329184"/>
-          </a:xfrm>
-          <a:prstGeom prst="rect">
-            <a:avLst/>
-          </a:prstGeom>
-          <a:noFill/>
-        </p:spPr>
-        <p:txBody>
-          <a:bodyPr wrap="square" lIns="0" rIns="0" tIns="0" bIns="0">
-            <a:spAutoFit/>
-          </a:bodyPr>
-          <a:lstStyle/>
-          <a:p>
-            <a:r>
-              <a:rPr sz="1100" b="0">
-                <a:solidFill>
-                  <a:srgbClr val="141833"/>
-                </a:solidFill>
-                <a:latin typeface="Helvetica Neue"/>
-              </a:rPr>
-              <a:t>AI Fake News</a:t>
-            </a:r>
-          </a:p>
-        </p:txBody>
-      </p:sp>
-      <p:sp>
-        <p:nvSpPr>
-          <p:cNvPr id="31" name="Rectangle 30"/>
-          <p:cNvSpPr/>
-          <p:nvPr/>
-        </p:nvSpPr>
-        <p:spPr>
-          <a:xfrm>
-            <a:off x="3383280" y="4837176"/>
-            <a:ext cx="1797464" cy="192024"/>
-          </a:xfrm>
-          <a:prstGeom prst="rect">
-            <a:avLst/>
-          </a:prstGeom>
-          <a:solidFill>
-            <a:srgbClr val="990011"/>
-          </a:solidFill>
-          <a:ln>
-            <a:noFill/>
-          </a:ln>
-          <a:effectLst/>
-        </p:spPr>
-        <p:style>
-          <a:lnRef idx="1">
-            <a:schemeClr val="accent1"/>
-          </a:lnRef>
-          <a:fillRef idx="3">
-            <a:schemeClr val="accent1"/>
-          </a:fillRef>
-          <a:effectRef idx="2">
-            <a:schemeClr val="accent1"/>
-          </a:effectRef>
-          <a:fontRef idx="minor">
-            <a:schemeClr val="lt1"/>
-          </a:fontRef>
-        </p:style>
-        <p:txBody>
-          <a:bodyPr rtlCol="0" anchor="ctr"/>
-          <a:lstStyle/>
-          <a:p>
-            <a:pPr algn="ctr"/>
-          </a:p>
-        </p:txBody>
-      </p:sp>
-      <p:sp>
-        <p:nvSpPr>
-          <p:cNvPr id="32" name="TextBox 31"/>
-          <p:cNvSpPr txBox="1"/>
-          <p:nvPr/>
-        </p:nvSpPr>
-        <p:spPr>
-          <a:xfrm>
-            <a:off x="5272184" y="4809744"/>
-            <a:ext cx="2286000" cy="329184"/>
-          </a:xfrm>
-          <a:prstGeom prst="rect">
-            <a:avLst/>
-          </a:prstGeom>
-          <a:noFill/>
-        </p:spPr>
-        <p:txBody>
-          <a:bodyPr wrap="square" lIns="0" rIns="0" tIns="0" bIns="0">
-            <a:spAutoFit/>
-          </a:bodyPr>
-          <a:lstStyle/>
-          <a:p>
-            <a:r>
-              <a:rPr sz="1000" b="0">
-                <a:solidFill>
-                  <a:srgbClr val="6B7082"/>
-                </a:solidFill>
-                <a:latin typeface="Helvetica Neue"/>
-              </a:rPr>
-              <a:t>12,918   (7 posts · 1,845 avg)</a:t>
-            </a:r>
-          </a:p>
-        </p:txBody>
-      </p:sp>
-      <p:sp>
-        <p:nvSpPr>
-          <p:cNvPr id="33" name="TextBox 32"/>
-          <p:cNvSpPr txBox="1"/>
-          <p:nvPr/>
-        </p:nvSpPr>
-        <p:spPr>
-          <a:xfrm>
-            <a:off x="731520" y="5138928"/>
-            <a:ext cx="2468880" cy="329184"/>
-          </a:xfrm>
-          <a:prstGeom prst="rect">
-            <a:avLst/>
-          </a:prstGeom>
-          <a:noFill/>
-        </p:spPr>
-        <p:txBody>
-          <a:bodyPr wrap="square" lIns="0" rIns="0" tIns="0" bIns="0">
-            <a:spAutoFit/>
-          </a:bodyPr>
-          <a:lstStyle/>
-          <a:p>
-            <a:r>
-              <a:rPr sz="1100" b="0">
-                <a:solidFill>
-                  <a:srgbClr val="141833"/>
-                </a:solidFill>
-                <a:latin typeface="Helvetica Neue"/>
-              </a:rPr>
-              <a:t>FIFA — Critique</a:t>
-            </a:r>
-          </a:p>
-        </p:txBody>
-      </p:sp>
-      <p:sp>
-        <p:nvSpPr>
-          <p:cNvPr id="34" name="Rectangle 33"/>
-          <p:cNvSpPr/>
-          <p:nvPr/>
-        </p:nvSpPr>
-        <p:spPr>
-          <a:xfrm>
-            <a:off x="3383280" y="5166359"/>
-            <a:ext cx="1639953" cy="192024"/>
-          </a:xfrm>
-          <a:prstGeom prst="rect">
-            <a:avLst/>
-          </a:prstGeom>
-          <a:solidFill>
-            <a:srgbClr val="6B7082"/>
-          </a:solidFill>
-          <a:ln>
-            <a:noFill/>
-          </a:ln>
-          <a:effectLst/>
-        </p:spPr>
-        <p:style>
-          <a:lnRef idx="1">
-            <a:schemeClr val="accent1"/>
-          </a:lnRef>
-          <a:fillRef idx="3">
-            <a:schemeClr val="accent1"/>
-          </a:fillRef>
-          <a:effectRef idx="2">
-            <a:schemeClr val="accent1"/>
-          </a:effectRef>
-          <a:fontRef idx="minor">
-            <a:schemeClr val="lt1"/>
-          </a:fontRef>
-        </p:style>
-        <p:txBody>
-          <a:bodyPr rtlCol="0" anchor="ctr"/>
-          <a:lstStyle/>
-          <a:p>
-            <a:pPr algn="ctr"/>
-          </a:p>
-        </p:txBody>
-      </p:sp>
-      <p:sp>
-        <p:nvSpPr>
-          <p:cNvPr id="35" name="TextBox 34"/>
-          <p:cNvSpPr txBox="1"/>
-          <p:nvPr/>
-        </p:nvSpPr>
-        <p:spPr>
-          <a:xfrm>
-            <a:off x="5114673" y="5138928"/>
-            <a:ext cx="2286000" cy="329184"/>
-          </a:xfrm>
-          <a:prstGeom prst="rect">
-            <a:avLst/>
-          </a:prstGeom>
-          <a:noFill/>
-        </p:spPr>
-        <p:txBody>
-          <a:bodyPr wrap="square" lIns="0" rIns="0" tIns="0" bIns="0">
-            <a:spAutoFit/>
-          </a:bodyPr>
-          <a:lstStyle/>
-          <a:p>
-            <a:r>
-              <a:rPr sz="1000" b="0">
-                <a:solidFill>
-                  <a:srgbClr val="6B7082"/>
-                </a:solidFill>
-                <a:latin typeface="Helvetica Neue"/>
-              </a:rPr>
-              <a:t>11,786   (8 posts · 1,473 avg)</a:t>
-            </a:r>
-          </a:p>
-        </p:txBody>
-      </p:sp>
-      <p:sp>
-        <p:nvSpPr>
-          <p:cNvPr id="36" name="TextBox 35"/>
-          <p:cNvSpPr txBox="1"/>
-          <p:nvPr/>
-        </p:nvSpPr>
-        <p:spPr>
-          <a:xfrm>
-            <a:off x="731520" y="5468112"/>
-            <a:ext cx="2468880" cy="329184"/>
-          </a:xfrm>
-          <a:prstGeom prst="rect">
-            <a:avLst/>
-          </a:prstGeom>
-          <a:noFill/>
-        </p:spPr>
-        <p:txBody>
-          <a:bodyPr wrap="square" lIns="0" rIns="0" tIns="0" bIns="0">
-            <a:spAutoFit/>
-          </a:bodyPr>
-          <a:lstStyle/>
-          <a:p>
-            <a:r>
-              <a:rPr sz="1100" b="0">
-                <a:solidFill>
-                  <a:srgbClr val="141833"/>
-                </a:solidFill>
-                <a:latin typeface="Helvetica Neue"/>
-              </a:rPr>
-              <a:t>Resident Highlight</a:t>
-            </a:r>
-          </a:p>
-        </p:txBody>
-      </p:sp>
-      <p:sp>
-        <p:nvSpPr>
-          <p:cNvPr id="37" name="Rectangle 36"/>
-          <p:cNvSpPr/>
-          <p:nvPr/>
-        </p:nvSpPr>
-        <p:spPr>
-          <a:xfrm>
-            <a:off x="3383280" y="5495543"/>
-            <a:ext cx="1016030" cy="192024"/>
+            <a:off x="3383280" y="5824728"/>
+            <a:ext cx="1015372" cy="192024"/>
           </a:xfrm>
           <a:prstGeom prst="rect">
             <a:avLst/>
@@ -6680,13 +6792,13 @@
       </p:sp>
       <p:sp>
         <p:nvSpPr>
-          <p:cNvPr id="38" name="TextBox 37"/>
-          <p:cNvSpPr txBox="1"/>
-          <p:nvPr/>
-        </p:nvSpPr>
-        <p:spPr>
-          <a:xfrm>
-            <a:off x="4490750" y="5468112"/>
+          <p:cNvPr id="41" name="TextBox 40"/>
+          <p:cNvSpPr txBox="1"/>
+          <p:nvPr/>
+        </p:nvSpPr>
+        <p:spPr>
+          <a:xfrm>
+            <a:off x="4490092" y="5797296"/>
             <a:ext cx="2286000" cy="329184"/>
           </a:xfrm>
           <a:prstGeom prst="rect">
@@ -6707,119 +6819,7 @@
                 </a:solidFill>
                 <a:latin typeface="Helvetica Neue"/>
               </a:rPr>
-              <a:t>7,302   (6 posts · 1,217 avg)</a:t>
-            </a:r>
-          </a:p>
-        </p:txBody>
-      </p:sp>
-      <p:sp>
-        <p:nvSpPr>
-          <p:cNvPr id="39" name="TextBox 38"/>
-          <p:cNvSpPr txBox="1"/>
-          <p:nvPr/>
-        </p:nvSpPr>
-        <p:spPr>
-          <a:xfrm>
-            <a:off x="731520" y="5797296"/>
-            <a:ext cx="2468880" cy="329184"/>
-          </a:xfrm>
-          <a:prstGeom prst="rect">
-            <a:avLst/>
-          </a:prstGeom>
-          <a:noFill/>
-        </p:spPr>
-        <p:txBody>
-          <a:bodyPr wrap="square" lIns="0" rIns="0" tIns="0" bIns="0">
-            <a:spAutoFit/>
-          </a:bodyPr>
-          <a:lstStyle/>
-          <a:p>
-            <a:r>
-              <a:rPr sz="1100" b="0">
-                <a:solidFill>
-                  <a:srgbClr val="141833"/>
-                </a:solidFill>
-                <a:latin typeface="Helvetica Neue"/>
-              </a:rPr>
-              <a:t>Community Events</a:t>
-            </a:r>
-          </a:p>
-        </p:txBody>
-      </p:sp>
-      <p:sp>
-        <p:nvSpPr>
-          <p:cNvPr id="40" name="Rectangle 39"/>
-          <p:cNvSpPr/>
-          <p:nvPr/>
-        </p:nvSpPr>
-        <p:spPr>
-          <a:xfrm>
-            <a:off x="3383280" y="5824728"/>
-            <a:ext cx="926282" cy="192024"/>
-          </a:xfrm>
-          <a:prstGeom prst="rect">
-            <a:avLst/>
-          </a:prstGeom>
-          <a:solidFill>
-            <a:srgbClr val="141833"/>
-          </a:solidFill>
-          <a:ln>
-            <a:noFill/>
-          </a:ln>
-          <a:effectLst/>
-        </p:spPr>
-        <p:style>
-          <a:lnRef idx="1">
-            <a:schemeClr val="accent1"/>
-          </a:lnRef>
-          <a:fillRef idx="3">
-            <a:schemeClr val="accent1"/>
-          </a:fillRef>
-          <a:effectRef idx="2">
-            <a:schemeClr val="accent1"/>
-          </a:effectRef>
-          <a:fontRef idx="minor">
-            <a:schemeClr val="lt1"/>
-          </a:fontRef>
-        </p:style>
-        <p:txBody>
-          <a:bodyPr rtlCol="0" anchor="ctr"/>
-          <a:lstStyle/>
-          <a:p>
-            <a:pPr algn="ctr"/>
-          </a:p>
-        </p:txBody>
-      </p:sp>
-      <p:sp>
-        <p:nvSpPr>
-          <p:cNvPr id="41" name="TextBox 40"/>
-          <p:cNvSpPr txBox="1"/>
-          <p:nvPr/>
-        </p:nvSpPr>
-        <p:spPr>
-          <a:xfrm>
-            <a:off x="4401002" y="5797296"/>
-            <a:ext cx="2286000" cy="329184"/>
-          </a:xfrm>
-          <a:prstGeom prst="rect">
-            <a:avLst/>
-          </a:prstGeom>
-          <a:noFill/>
-        </p:spPr>
-        <p:txBody>
-          <a:bodyPr wrap="square" lIns="0" rIns="0" tIns="0" bIns="0">
-            <a:spAutoFit/>
-          </a:bodyPr>
-          <a:lstStyle/>
-          <a:p>
-            <a:r>
-              <a:rPr sz="1000" b="0">
-                <a:solidFill>
-                  <a:srgbClr val="6B7082"/>
-                </a:solidFill>
-                <a:latin typeface="Helvetica Neue"/>
-              </a:rPr>
-              <a:t>6,657   (16 posts · 416 avg)</a:t>
+              <a:t>7,314   (6 posts · 1,219 avg)</a:t>
             </a:r>
           </a:p>
         </p:txBody>
@@ -7703,7 +7703,7 @@
                 </a:solidFill>
                 <a:latin typeface="Helvetica Neue"/>
               </a:rPr>
-              <a:t>Watch party in Stonewood Mall! Over 25,000 people showed up for this epic event.</a:t>
+              <a:t>Combat jobs aren't for everyone. See how your MOS determines deployment likeliho</a:t>
             </a:r>
           </a:p>
         </p:txBody>
@@ -7737,7 +7737,7 @@
                 </a:solidFill>
                 <a:latin typeface="Helvetica Neue"/>
               </a:rPr>
-              <a:t>27,300</a:t>
+              <a:t>28,000</a:t>
             </a:r>
           </a:p>
         </p:txBody>
@@ -7771,7 +7771,7 @@
                 </a:solidFill>
                 <a:latin typeface="Helvetica Neue"/>
               </a:rPr>
-              <a:t>805</a:t>
+              <a:t>1,700</a:t>
             </a:r>
           </a:p>
         </p:txBody>
@@ -7805,7 +7805,7 @@
                 </a:solidFill>
                 <a:latin typeface="Helvetica Neue"/>
               </a:rPr>
-              <a:t>Fifa Positive</a:t>
+              <a:t>American Pride</a:t>
             </a:r>
           </a:p>
         </p:txBody>
@@ -7951,7 +7951,7 @@
                 </a:solidFill>
                 <a:latin typeface="Helvetica Neue"/>
               </a:rPr>
-              <a:t>Mama Lu's is coming to Downey! Asian community favorite, famous for their tender</a:t>
+              <a:t>Watch party in Stonewood Mall! Over 25,000 people showed up for this epic event.</a:t>
             </a:r>
           </a:p>
         </p:txBody>
@@ -7985,7 +7985,7 @@
                 </a:solidFill>
                 <a:latin typeface="Helvetica Neue"/>
               </a:rPr>
-              <a:t>13,600</a:t>
+              <a:t>27,400</a:t>
             </a:r>
           </a:p>
         </p:txBody>
@@ -8019,7 +8019,7 @@
                 </a:solidFill>
                 <a:latin typeface="Helvetica Neue"/>
               </a:rPr>
-              <a:t>951</a:t>
+              <a:t>806</a:t>
             </a:r>
           </a:p>
         </p:txBody>
@@ -8053,7 +8053,7 @@
                 </a:solidFill>
                 <a:latin typeface="Helvetica Neue"/>
               </a:rPr>
-              <a:t>Food</a:t>
+              <a:t>Fifa Positive</a:t>
             </a:r>
           </a:p>
         </p:txBody>
@@ -8199,7 +8199,7 @@
                 </a:solidFill>
                 <a:latin typeface="Helvetica Neue"/>
               </a:rPr>
-              <a:t>Grew up in Huntington Park and still own property there. The city's o...</a:t>
+              <a:t>Mama Lu's is coming to Downey! Asian community favorite, famous for their tender</a:t>
             </a:r>
           </a:p>
         </p:txBody>
@@ -8233,7 +8233,7 @@
                 </a:solidFill>
                 <a:latin typeface="Helvetica Neue"/>
               </a:rPr>
-              <a:t>9,839</a:t>
+              <a:t>13,600</a:t>
             </a:r>
           </a:p>
         </p:txBody>
@@ -8267,7 +8267,7 @@
                 </a:solidFill>
                 <a:latin typeface="Helvetica Neue"/>
               </a:rPr>
-              <a:t>548</a:t>
+              <a:t>951</a:t>
             </a:r>
           </a:p>
         </p:txBody>
@@ -8301,7 +8301,7 @@
                 </a:solidFill>
                 <a:latin typeface="Helvetica Neue"/>
               </a:rPr>
-              <a:t>Trujillo Scandal</a:t>
+              <a:t>Food</a:t>
             </a:r>
           </a:p>
         </p:txBody>
@@ -8369,7 +8369,7 @@
                 </a:solidFill>
                 <a:latin typeface="Helvetica Neue"/>
               </a:rPr>
-              <a:t>IG</a:t>
+              <a:t>TT</a:t>
             </a:r>
           </a:p>
         </p:txBody>
@@ -8403,7 +8403,7 @@
                 </a:solidFill>
                 <a:latin typeface="Helvetica Neue"/>
               </a:rPr>
-              <a:t>25,000+ people gathered for a watch party at Stonewood Mall! Despite the $300k c</a:t>
+              <a:t>Grew up in Huntington Park and still own property there. The city's o...</a:t>
             </a:r>
           </a:p>
         </p:txBody>
@@ -8437,7 +8437,7 @@
                 </a:solidFill>
                 <a:latin typeface="Helvetica Neue"/>
               </a:rPr>
-              <a:t>7,180</a:t>
+              <a:t>9,839</a:t>
             </a:r>
           </a:p>
         </p:txBody>
@@ -8471,7 +8471,7 @@
                 </a:solidFill>
                 <a:latin typeface="Helvetica Neue"/>
               </a:rPr>
-              <a:t>264</a:t>
+              <a:t>548</a:t>
             </a:r>
           </a:p>
         </p:txBody>
@@ -8505,7 +8505,7 @@
                 </a:solidFill>
                 <a:latin typeface="Helvetica Neue"/>
               </a:rPr>
-              <a:t>Fifa Positive</a:t>
+              <a:t>Trujillo Scandal</a:t>
             </a:r>
           </a:p>
         </p:txBody>
@@ -8617,7 +8617,7 @@
                 </a:solidFill>
                 <a:latin typeface="Helvetica Neue"/>
               </a:rPr>
-              <a:t>IG</a:t>
+              <a:t>TT</a:t>
             </a:r>
           </a:p>
         </p:txBody>
@@ -8651,7 +8651,7 @@
                 </a:solidFill>
                 <a:latin typeface="Helvetica Neue"/>
               </a:rPr>
-              <a:t>A woman's outburst at a city council meeting, repeatedly warned by the mayor, le</a:t>
+              <a:t>Pop's Wings just opened and it's a must-try! Their pastrami sandwich with sweet </a:t>
             </a:r>
           </a:p>
         </p:txBody>
@@ -8685,7 +8685,7 @@
                 </a:solidFill>
                 <a:latin typeface="Helvetica Neue"/>
               </a:rPr>
-              <a:t>7,031</a:t>
+              <a:t>7,360</a:t>
             </a:r>
           </a:p>
         </p:txBody>
@@ -8719,7 +8719,7 @@
                 </a:solidFill>
                 <a:latin typeface="Helvetica Neue"/>
               </a:rPr>
-              <a:t>93</a:t>
+              <a:t>364</a:t>
             </a:r>
           </a:p>
         </p:txBody>
@@ -8753,7 +8753,7 @@
                 </a:solidFill>
                 <a:latin typeface="Helvetica Neue"/>
               </a:rPr>
-              <a:t>Council Chaos</a:t>
+              <a:t>Other</a:t>
             </a:r>
           </a:p>
         </p:txBody>
@@ -8821,7 +8821,7 @@
                 </a:solidFill>
                 <a:latin typeface="Helvetica Neue"/>
               </a:rPr>
-              <a:t>FB</a:t>
+              <a:t>IG</a:t>
             </a:r>
           </a:p>
         </p:txBody>
@@ -8855,7 +8855,7 @@
                 </a:solidFill>
                 <a:latin typeface="Helvetica Neue"/>
               </a:rPr>
-              <a:t>After admitting 'I messed up,' a city councilman's inappropriate conduct is unde</a:t>
+              <a:t>25,000+ people gathered for a watch party at Stonewood Mall! Despite the $300k c</a:t>
             </a:r>
           </a:p>
         </p:txBody>
@@ -8889,7 +8889,7 @@
                 </a:solidFill>
                 <a:latin typeface="Helvetica Neue"/>
               </a:rPr>
-              <a:t>6,363</a:t>
+              <a:t>7,180</a:t>
             </a:r>
           </a:p>
         </p:txBody>
@@ -8923,7 +8923,7 @@
                 </a:solidFill>
                 <a:latin typeface="Helvetica Neue"/>
               </a:rPr>
-              <a:t>42</a:t>
+              <a:t>264</a:t>
             </a:r>
           </a:p>
         </p:txBody>
@@ -8957,7 +8957,7 @@
                 </a:solidFill>
                 <a:latin typeface="Helvetica Neue"/>
               </a:rPr>
-              <a:t>Council Chaos</a:t>
+              <a:t>Fifa Positive</a:t>
             </a:r>
           </a:p>
         </p:txBody>
@@ -9069,7 +9069,7 @@
                 </a:solidFill>
                 <a:latin typeface="Helvetica Neue"/>
               </a:rPr>
-              <a:t>FB</a:t>
+              <a:t>IG</a:t>
             </a:r>
           </a:p>
         </p:txBody>
@@ -9103,7 +9103,7 @@
                 </a:solidFill>
                 <a:latin typeface="Helvetica Neue"/>
               </a:rPr>
-              <a:t>Over 25,000 people gathered at Stonewood Mall for a massive watch party. Despite</a:t>
+              <a:t>A woman's outburst at a city council meeting, repeatedly warned by the mayor, le</a:t>
             </a:r>
           </a:p>
         </p:txBody>
@@ -9137,7 +9137,7 @@
                 </a:solidFill>
                 <a:latin typeface="Helvetica Neue"/>
               </a:rPr>
-              <a:t>6,355</a:t>
+              <a:t>7,031</a:t>
             </a:r>
           </a:p>
         </p:txBody>
@@ -9171,7 +9171,7 @@
                 </a:solidFill>
                 <a:latin typeface="Helvetica Neue"/>
               </a:rPr>
-              <a:t>46</a:t>
+              <a:t>93</a:t>
             </a:r>
           </a:p>
         </p:txBody>
@@ -9205,7 +9205,7 @@
                 </a:solidFill>
                 <a:latin typeface="Helvetica Neue"/>
               </a:rPr>
-              <a:t>Fifa Positive</a:t>
+              <a:t>Council Chaos</a:t>
             </a:r>
           </a:p>
         </p:txBody>
@@ -9273,7 +9273,7 @@
                 </a:solidFill>
                 <a:latin typeface="Helvetica Neue"/>
               </a:rPr>
-              <a:t>IG</a:t>
+              <a:t>FB</a:t>
             </a:r>
           </a:p>
         </p:txBody>
@@ -9307,7 +9307,7 @@
                 </a:solidFill>
                 <a:latin typeface="Helvetica Neue"/>
               </a:rPr>
-              <a:t>I grew up in Huntington Park, and I still own property there. But the rules and </a:t>
+              <a:t>After admitting 'I messed up,' a city councilman's inappropriate conduct is unde</a:t>
             </a:r>
           </a:p>
         </p:txBody>
@@ -9341,7 +9341,7 @@
                 </a:solidFill>
                 <a:latin typeface="Helvetica Neue"/>
               </a:rPr>
-              <a:t>6,289</a:t>
+              <a:t>6,363</a:t>
             </a:r>
           </a:p>
         </p:txBody>
@@ -9375,7 +9375,7 @@
                 </a:solidFill>
                 <a:latin typeface="Helvetica Neue"/>
               </a:rPr>
-              <a:t>206</a:t>
+              <a:t>42</a:t>
             </a:r>
           </a:p>
         </p:txBody>
@@ -9409,7 +9409,7 @@
                 </a:solidFill>
                 <a:latin typeface="Helvetica Neue"/>
               </a:rPr>
-              <a:t>Trujillo Scandal</a:t>
+              <a:t>Council Chaos</a:t>
             </a:r>
           </a:p>
         </p:txBody>
@@ -9521,7 +9521,7 @@
                 </a:solidFill>
                 <a:latin typeface="Helvetica Neue"/>
               </a:rPr>
-              <a:t>TT</a:t>
+              <a:t>FB</a:t>
             </a:r>
           </a:p>
         </p:txBody>
@@ -9555,7 +9555,7 @@
                 </a:solidFill>
                 <a:latin typeface="Helvetica Neue"/>
               </a:rPr>
-              <a:t>World Cup profits hit $11 billion for FIFA, potentially reaching $13 ...</a:t>
+              <a:t>Over 25,000 people gathered at Stonewood Mall for a massive watch party. Despite</a:t>
             </a:r>
           </a:p>
         </p:txBody>
@@ -9589,7 +9589,7 @@
                 </a:solidFill>
                 <a:latin typeface="Helvetica Neue"/>
               </a:rPr>
-              <a:t>6,053</a:t>
+              <a:t>6,355</a:t>
             </a:r>
           </a:p>
         </p:txBody>
@@ -9623,7 +9623,7 @@
                 </a:solidFill>
                 <a:latin typeface="Helvetica Neue"/>
               </a:rPr>
-              <a:t>75</a:t>
+              <a:t>46</a:t>
             </a:r>
           </a:p>
         </p:txBody>
@@ -9657,7 +9657,7 @@
                 </a:solidFill>
                 <a:latin typeface="Helvetica Neue"/>
               </a:rPr>
-              <a:t>Fifa Critique</a:t>
+              <a:t>Fifa Positive</a:t>
             </a:r>
           </a:p>
         </p:txBody>
